--- a/Design Log/Music Library.pptx
+++ b/Design Log/Music Library.pptx
@@ -5,7 +5,7 @@
     <p:sldMasterId id="2147483648" r:id="rId1"/>
   </p:sldMasterIdLst>
   <p:notesMasterIdLst>
-    <p:notesMasterId r:id="rId13"/>
+    <p:notesMasterId r:id="rId15"/>
   </p:notesMasterIdLst>
   <p:sldIdLst>
     <p:sldId id="256" r:id="rId2"/>
@@ -15,10 +15,12 @@
     <p:sldId id="260" r:id="rId6"/>
     <p:sldId id="261" r:id="rId7"/>
     <p:sldId id="262" r:id="rId8"/>
-    <p:sldId id="263" r:id="rId9"/>
-    <p:sldId id="264" r:id="rId10"/>
-    <p:sldId id="265" r:id="rId11"/>
-    <p:sldId id="266" r:id="rId12"/>
+    <p:sldId id="264" r:id="rId9"/>
+    <p:sldId id="265" r:id="rId10"/>
+    <p:sldId id="266" r:id="rId11"/>
+    <p:sldId id="267" r:id="rId12"/>
+    <p:sldId id="268" r:id="rId13"/>
+    <p:sldId id="269" r:id="rId14"/>
   </p:sldIdLst>
   <p:sldSz cx="12192000" cy="6858000"/>
   <p:notesSz cx="6858000" cy="9144000"/>
@@ -207,7 +209,7 @@
           <a:p>
             <a:fld id="{69EAFAAE-CE2E-4AA9-83BD-55884CEF3EFD}" type="datetimeFigureOut">
               <a:rPr lang="nl-NL" smtClean="0"/>
-              <a:t>25-4-2025</a:t>
+              <a:t>29-5-2025</a:t>
             </a:fld>
             <a:endParaRPr lang="nl-NL"/>
           </a:p>
@@ -475,90 +477,6 @@
 </p:notesMaster>
 </file>
 
-<file path=ppt/notesSlides/notesSlide1.xml><?xml version="1.0" encoding="utf-8"?>
-<p:notes xmlns:a="http://schemas.openxmlformats.org/drawingml/2006/main" xmlns:r="http://schemas.openxmlformats.org/officeDocument/2006/relationships" xmlns:p="http://schemas.openxmlformats.org/presentationml/2006/main">
-  <p:cSld>
-    <p:spTree>
-      <p:nvGrpSpPr>
-        <p:cNvPr id="1" name=""/>
-        <p:cNvGrpSpPr/>
-        <p:nvPr/>
-      </p:nvGrpSpPr>
-      <p:grpSpPr>
-        <a:xfrm>
-          <a:off x="0" y="0"/>
-          <a:ext cx="0" cy="0"/>
-          <a:chOff x="0" y="0"/>
-          <a:chExt cx="0" cy="0"/>
-        </a:xfrm>
-      </p:grpSpPr>
-      <p:sp>
-        <p:nvSpPr>
-          <p:cNvPr id="2" name="Slide Image Placeholder 1"/>
-          <p:cNvSpPr>
-            <a:spLocks noGrp="1" noRot="1" noChangeAspect="1"/>
-          </p:cNvSpPr>
-          <p:nvPr>
-            <p:ph type="sldImg"/>
-          </p:nvPr>
-        </p:nvSpPr>
-        <p:spPr/>
-      </p:sp>
-      <p:sp>
-        <p:nvSpPr>
-          <p:cNvPr id="3" name="Notes Placeholder 2"/>
-          <p:cNvSpPr>
-            <a:spLocks noGrp="1"/>
-          </p:cNvSpPr>
-          <p:nvPr>
-            <p:ph type="body" idx="1"/>
-          </p:nvPr>
-        </p:nvSpPr>
-        <p:spPr/>
-        <p:txBody>
-          <a:bodyPr/>
-          <a:lstStyle/>
-          <a:p>
-            <a:endParaRPr lang="nl-NL" dirty="0"/>
-          </a:p>
-        </p:txBody>
-      </p:sp>
-      <p:sp>
-        <p:nvSpPr>
-          <p:cNvPr id="4" name="Slide Number Placeholder 3"/>
-          <p:cNvSpPr>
-            <a:spLocks noGrp="1"/>
-          </p:cNvSpPr>
-          <p:nvPr>
-            <p:ph type="sldNum" sz="quarter" idx="5"/>
-          </p:nvPr>
-        </p:nvSpPr>
-        <p:spPr/>
-        <p:txBody>
-          <a:bodyPr/>
-          <a:lstStyle/>
-          <a:p>
-            <a:fld id="{7A282268-7929-47D7-82CF-C37566B4B8ED}" type="slidenum">
-              <a:rPr lang="nl-NL" smtClean="0"/>
-              <a:t>8</a:t>
-            </a:fld>
-            <a:endParaRPr lang="nl-NL"/>
-          </a:p>
-        </p:txBody>
-      </p:sp>
-    </p:spTree>
-    <p:extLst>
-      <p:ext uri="{BB962C8B-B14F-4D97-AF65-F5344CB8AC3E}">
-        <p14:creationId xmlns:p14="http://schemas.microsoft.com/office/powerpoint/2010/main" val="1199364836"/>
-      </p:ext>
-    </p:extLst>
-  </p:cSld>
-  <p:clrMapOvr>
-    <a:masterClrMapping/>
-  </p:clrMapOvr>
-</p:notes>
-</file>
-
 <file path=ppt/slideLayouts/slideLayout1.xml><?xml version="1.0" encoding="utf-8"?>
 <p:sldLayout xmlns:a="http://schemas.openxmlformats.org/drawingml/2006/main" xmlns:r="http://schemas.openxmlformats.org/officeDocument/2006/relationships" xmlns:p="http://schemas.openxmlformats.org/presentationml/2006/main" type="title" preserve="1">
   <p:cSld name="Title Slide">
@@ -708,7 +626,7 @@
           <a:p>
             <a:fld id="{0506D139-8255-4032-8342-CDBE6BDAFC36}" type="datetimeFigureOut">
               <a:rPr lang="nl-NL" smtClean="0"/>
-              <a:t>25-4-2025</a:t>
+              <a:t>29-5-2025</a:t>
             </a:fld>
             <a:endParaRPr lang="nl-NL"/>
           </a:p>
@@ -908,7 +826,7 @@
           <a:p>
             <a:fld id="{0506D139-8255-4032-8342-CDBE6BDAFC36}" type="datetimeFigureOut">
               <a:rPr lang="nl-NL" smtClean="0"/>
-              <a:t>25-4-2025</a:t>
+              <a:t>29-5-2025</a:t>
             </a:fld>
             <a:endParaRPr lang="nl-NL"/>
           </a:p>
@@ -1118,7 +1036,7 @@
           <a:p>
             <a:fld id="{0506D139-8255-4032-8342-CDBE6BDAFC36}" type="datetimeFigureOut">
               <a:rPr lang="nl-NL" smtClean="0"/>
-              <a:t>25-4-2025</a:t>
+              <a:t>29-5-2025</a:t>
             </a:fld>
             <a:endParaRPr lang="nl-NL"/>
           </a:p>
@@ -1318,7 +1236,7 @@
           <a:p>
             <a:fld id="{0506D139-8255-4032-8342-CDBE6BDAFC36}" type="datetimeFigureOut">
               <a:rPr lang="nl-NL" smtClean="0"/>
-              <a:t>25-4-2025</a:t>
+              <a:t>29-5-2025</a:t>
             </a:fld>
             <a:endParaRPr lang="nl-NL"/>
           </a:p>
@@ -1594,7 +1512,7 @@
           <a:p>
             <a:fld id="{0506D139-8255-4032-8342-CDBE6BDAFC36}" type="datetimeFigureOut">
               <a:rPr lang="nl-NL" smtClean="0"/>
-              <a:t>25-4-2025</a:t>
+              <a:t>29-5-2025</a:t>
             </a:fld>
             <a:endParaRPr lang="nl-NL"/>
           </a:p>
@@ -1862,7 +1780,7 @@
           <a:p>
             <a:fld id="{0506D139-8255-4032-8342-CDBE6BDAFC36}" type="datetimeFigureOut">
               <a:rPr lang="nl-NL" smtClean="0"/>
-              <a:t>25-4-2025</a:t>
+              <a:t>29-5-2025</a:t>
             </a:fld>
             <a:endParaRPr lang="nl-NL"/>
           </a:p>
@@ -2277,7 +2195,7 @@
           <a:p>
             <a:fld id="{0506D139-8255-4032-8342-CDBE6BDAFC36}" type="datetimeFigureOut">
               <a:rPr lang="nl-NL" smtClean="0"/>
-              <a:t>25-4-2025</a:t>
+              <a:t>29-5-2025</a:t>
             </a:fld>
             <a:endParaRPr lang="nl-NL"/>
           </a:p>
@@ -2419,7 +2337,7 @@
           <a:p>
             <a:fld id="{0506D139-8255-4032-8342-CDBE6BDAFC36}" type="datetimeFigureOut">
               <a:rPr lang="nl-NL" smtClean="0"/>
-              <a:t>25-4-2025</a:t>
+              <a:t>29-5-2025</a:t>
             </a:fld>
             <a:endParaRPr lang="nl-NL"/>
           </a:p>
@@ -2532,7 +2450,7 @@
           <a:p>
             <a:fld id="{0506D139-8255-4032-8342-CDBE6BDAFC36}" type="datetimeFigureOut">
               <a:rPr lang="nl-NL" smtClean="0"/>
-              <a:t>25-4-2025</a:t>
+              <a:t>29-5-2025</a:t>
             </a:fld>
             <a:endParaRPr lang="nl-NL"/>
           </a:p>
@@ -2845,7 +2763,7 @@
           <a:p>
             <a:fld id="{0506D139-8255-4032-8342-CDBE6BDAFC36}" type="datetimeFigureOut">
               <a:rPr lang="nl-NL" smtClean="0"/>
-              <a:t>25-4-2025</a:t>
+              <a:t>29-5-2025</a:t>
             </a:fld>
             <a:endParaRPr lang="nl-NL"/>
           </a:p>
@@ -3134,7 +3052,7 @@
           <a:p>
             <a:fld id="{0506D139-8255-4032-8342-CDBE6BDAFC36}" type="datetimeFigureOut">
               <a:rPr lang="nl-NL" smtClean="0"/>
-              <a:t>25-4-2025</a:t>
+              <a:t>29-5-2025</a:t>
             </a:fld>
             <a:endParaRPr lang="nl-NL"/>
           </a:p>
@@ -3377,7 +3295,7 @@
           <a:p>
             <a:fld id="{0506D139-8255-4032-8342-CDBE6BDAFC36}" type="datetimeFigureOut">
               <a:rPr lang="nl-NL" smtClean="0"/>
-              <a:t>25-4-2025</a:t>
+              <a:t>29-5-2025</a:t>
             </a:fld>
             <a:endParaRPr lang="nl-NL"/>
           </a:p>
@@ -3885,7 +3803,7 @@
           <p:cNvPr id="2" name="Title 1">
             <a:extLst>
               <a:ext uri="{FF2B5EF4-FFF2-40B4-BE49-F238E27FC236}">
-                <a16:creationId xmlns:a16="http://schemas.microsoft.com/office/drawing/2014/main" id="{DBF532D1-7B41-0108-913D-B6D7875DF57D}"/>
+                <a16:creationId xmlns:a16="http://schemas.microsoft.com/office/drawing/2014/main" id="{FD9482D7-2C1E-974F-0684-696B5C357A21}"/>
               </a:ext>
             </a:extLst>
           </p:cNvPr>
@@ -3903,11 +3821,11 @@
           <a:p>
             <a:r>
               <a:rPr lang="nl-NL" dirty="0" err="1"/>
-              <a:t>Duplicate</a:t>
-            </a:r>
-            <a:r>
-              <a:rPr lang="nl-NL" dirty="0"/>
-              <a:t> songs</a:t>
+              <a:t>Todo</a:t>
+            </a:r>
+            <a:r>
+              <a:rPr lang="nl-NL" dirty="0"/>
+              <a:t>	</a:t>
             </a:r>
           </a:p>
         </p:txBody>
@@ -3917,7 +3835,7 @@
           <p:cNvPr id="3" name="Content Placeholder 2">
             <a:extLst>
               <a:ext uri="{FF2B5EF4-FFF2-40B4-BE49-F238E27FC236}">
-                <a16:creationId xmlns:a16="http://schemas.microsoft.com/office/drawing/2014/main" id="{62E02C2A-CA24-A116-2112-F0F856AC9222}"/>
+                <a16:creationId xmlns:a16="http://schemas.microsoft.com/office/drawing/2014/main" id="{DBE30E8A-0A74-9C39-826D-40C3B285F625}"/>
               </a:ext>
             </a:extLst>
           </p:cNvPr>
@@ -3934,112 +3852,64 @@
           <a:lstStyle/>
           <a:p>
             <a:r>
-              <a:rPr lang="nl-NL" dirty="0" err="1"/>
-              <a:t>If</a:t>
-            </a:r>
-            <a:r>
-              <a:rPr lang="nl-NL" dirty="0"/>
-              <a:t> I have a </a:t>
-            </a:r>
-            <a:r>
-              <a:rPr lang="nl-NL" dirty="0" err="1"/>
-              <a:t>traktor</a:t>
-            </a:r>
-            <a:r>
-              <a:rPr lang="nl-NL" dirty="0"/>
-              <a:t> </a:t>
-            </a:r>
-            <a:r>
-              <a:rPr lang="nl-NL" dirty="0" err="1"/>
-              <a:t>library</a:t>
-            </a:r>
-            <a:r>
-              <a:rPr lang="nl-NL" dirty="0"/>
-              <a:t> </a:t>
-            </a:r>
-            <a:r>
-              <a:rPr lang="nl-NL" dirty="0" err="1"/>
-              <a:t>which</a:t>
-            </a:r>
-            <a:r>
-              <a:rPr lang="nl-NL" dirty="0"/>
-              <a:t> </a:t>
-            </a:r>
-            <a:r>
-              <a:rPr lang="nl-NL" dirty="0" err="1"/>
-              <a:t>includes</a:t>
-            </a:r>
-            <a:r>
-              <a:rPr lang="nl-NL" dirty="0"/>
-              <a:t> </a:t>
-            </a:r>
-            <a:r>
-              <a:rPr lang="nl-NL" dirty="0" err="1"/>
-              <a:t>the</a:t>
-            </a:r>
-            <a:r>
-              <a:rPr lang="nl-NL" dirty="0"/>
-              <a:t> exact </a:t>
-            </a:r>
-            <a:r>
-              <a:rPr lang="nl-NL" dirty="0" err="1"/>
-              <a:t>same</a:t>
-            </a:r>
-            <a:r>
-              <a:rPr lang="nl-NL" dirty="0"/>
-              <a:t> song </a:t>
-            </a:r>
-            <a:r>
-              <a:rPr lang="nl-NL" dirty="0" err="1"/>
-              <a:t>twice</a:t>
+              <a:rPr lang="nl-NL" dirty="0"/>
+              <a:t>Fix </a:t>
+            </a:r>
+            <a:r>
+              <a:rPr lang="nl-NL" dirty="0" err="1"/>
+              <a:t>Traktor</a:t>
+            </a:r>
+            <a:r>
+              <a:rPr lang="nl-NL" dirty="0"/>
+              <a:t> </a:t>
+            </a:r>
+            <a:r>
+              <a:rPr lang="nl-NL" dirty="0" err="1"/>
+              <a:t>analyzing</a:t>
             </a:r>
             <a:endParaRPr lang="nl-NL" dirty="0"/>
           </a:p>
           <a:p>
-            <a:pPr lvl="1"/>
-            <a:r>
-              <a:rPr lang="nl-NL" dirty="0"/>
-              <a:t>Both have </a:t>
-            </a:r>
-            <a:r>
-              <a:rPr lang="nl-NL" dirty="0" err="1"/>
-              <a:t>the</a:t>
-            </a:r>
-            <a:r>
-              <a:rPr lang="nl-NL" dirty="0"/>
-              <a:t> </a:t>
-            </a:r>
-            <a:r>
-              <a:rPr lang="nl-NL" dirty="0" err="1"/>
-              <a:t>same</a:t>
-            </a:r>
-            <a:r>
-              <a:rPr lang="nl-NL" dirty="0"/>
-              <a:t> audio </a:t>
-            </a:r>
-            <a:r>
-              <a:rPr lang="nl-NL" dirty="0" err="1"/>
-              <a:t>id</a:t>
+            <a:r>
+              <a:rPr lang="nl-NL" dirty="0"/>
+              <a:t>Download </a:t>
+            </a:r>
+            <a:r>
+              <a:rPr lang="nl-NL" dirty="0" err="1"/>
+              <a:t>remaining</a:t>
+            </a:r>
+            <a:r>
+              <a:rPr lang="nl-NL" dirty="0"/>
+              <a:t> songs</a:t>
+            </a:r>
+          </a:p>
+          <a:p>
+            <a:r>
+              <a:rPr lang="nl-NL" dirty="0"/>
+              <a:t>Make </a:t>
+            </a:r>
+            <a:r>
+              <a:rPr lang="nl-NL" dirty="0" err="1"/>
+              <a:t>custom</a:t>
+            </a:r>
+            <a:r>
+              <a:rPr lang="nl-NL" dirty="0"/>
+              <a:t> </a:t>
+            </a:r>
+            <a:r>
+              <a:rPr lang="nl-NL" dirty="0" err="1"/>
+              <a:t>playlists</a:t>
             </a:r>
             <a:endParaRPr lang="nl-NL" dirty="0"/>
           </a:p>
           <a:p>
-            <a:pPr lvl="1"/>
-            <a:r>
-              <a:rPr lang="nl-NL" dirty="0"/>
-              <a:t>But different file </a:t>
-            </a:r>
-            <a:r>
-              <a:rPr lang="nl-NL" dirty="0" err="1"/>
-              <a:t>location</a:t>
-            </a:r>
-            <a:endParaRPr lang="nl-NL" dirty="0"/>
-          </a:p>
-          <a:p>
-            <a:pPr lvl="1"/>
-            <a:r>
-              <a:rPr lang="nl-NL" dirty="0" err="1"/>
-              <a:t>When</a:t>
+            <a:r>
+              <a:rPr lang="nl-NL" dirty="0"/>
+              <a:t>Test </a:t>
+            </a:r>
+            <a:r>
+              <a:rPr lang="nl-NL" dirty="0" err="1"/>
+              <a:t>not-forced</a:t>
             </a:r>
             <a:r>
               <a:rPr lang="nl-NL" dirty="0"/>
@@ -4048,229 +3918,6 @@
             <a:r>
               <a:rPr lang="nl-NL" dirty="0" err="1"/>
               <a:t>loading</a:t>
-            </a:r>
-            <a:r>
-              <a:rPr lang="nl-NL" dirty="0"/>
-              <a:t> </a:t>
-            </a:r>
-            <a:r>
-              <a:rPr lang="nl-NL" dirty="0" err="1"/>
-              <a:t>the</a:t>
-            </a:r>
-            <a:r>
-              <a:rPr lang="nl-NL" dirty="0"/>
-              <a:t> </a:t>
-            </a:r>
-            <a:r>
-              <a:rPr lang="nl-NL" dirty="0" err="1"/>
-              <a:t>library</a:t>
-            </a:r>
-            <a:r>
-              <a:rPr lang="nl-NL" dirty="0"/>
-              <a:t> </a:t>
-            </a:r>
-            <a:r>
-              <a:rPr lang="nl-NL" dirty="0" err="1"/>
-              <a:t>there</a:t>
-            </a:r>
-            <a:r>
-              <a:rPr lang="nl-NL" dirty="0"/>
-              <a:t> </a:t>
-            </a:r>
-            <a:r>
-              <a:rPr lang="nl-NL" dirty="0" err="1"/>
-              <a:t>will</a:t>
-            </a:r>
-            <a:r>
-              <a:rPr lang="nl-NL" dirty="0"/>
-              <a:t> </a:t>
-            </a:r>
-            <a:r>
-              <a:rPr lang="nl-NL" dirty="0" err="1"/>
-              <a:t>be</a:t>
-            </a:r>
-            <a:r>
-              <a:rPr lang="nl-NL" dirty="0"/>
-              <a:t> made </a:t>
-            </a:r>
-            <a:r>
-              <a:rPr lang="nl-NL" dirty="0" err="1"/>
-              <a:t>one</a:t>
-            </a:r>
-            <a:r>
-              <a:rPr lang="nl-NL" dirty="0"/>
-              <a:t> entry, </a:t>
-            </a:r>
-            <a:r>
-              <a:rPr lang="nl-NL" dirty="0" err="1"/>
-              <a:t>and</a:t>
-            </a:r>
-            <a:r>
-              <a:rPr lang="nl-NL" dirty="0"/>
-              <a:t> </a:t>
-            </a:r>
-            <a:r>
-              <a:rPr lang="nl-NL" dirty="0" err="1"/>
-              <a:t>this</a:t>
-            </a:r>
-            <a:r>
-              <a:rPr lang="nl-NL" dirty="0"/>
-              <a:t> entry </a:t>
-            </a:r>
-            <a:r>
-              <a:rPr lang="nl-NL" dirty="0" err="1"/>
-              <a:t>will</a:t>
-            </a:r>
-            <a:r>
-              <a:rPr lang="nl-NL" dirty="0"/>
-              <a:t> </a:t>
-            </a:r>
-            <a:r>
-              <a:rPr lang="nl-NL" dirty="0" err="1"/>
-              <a:t>be</a:t>
-            </a:r>
-            <a:r>
-              <a:rPr lang="nl-NL" dirty="0"/>
-              <a:t> </a:t>
-            </a:r>
-            <a:r>
-              <a:rPr lang="nl-NL" dirty="0" err="1"/>
-              <a:t>overriden</a:t>
-            </a:r>
-            <a:r>
-              <a:rPr lang="nl-NL" dirty="0"/>
-              <a:t> </a:t>
-            </a:r>
-            <a:r>
-              <a:rPr lang="nl-NL" dirty="0" err="1"/>
-              <a:t>with</a:t>
-            </a:r>
-            <a:r>
-              <a:rPr lang="nl-NL" dirty="0"/>
-              <a:t> </a:t>
-            </a:r>
-            <a:r>
-              <a:rPr lang="nl-NL" dirty="0" err="1"/>
-              <a:t>the</a:t>
-            </a:r>
-            <a:r>
-              <a:rPr lang="nl-NL" dirty="0"/>
-              <a:t> </a:t>
-            </a:r>
-            <a:r>
-              <a:rPr lang="nl-NL" dirty="0" err="1"/>
-              <a:t>other</a:t>
-            </a:r>
-            <a:r>
-              <a:rPr lang="nl-NL" dirty="0"/>
-              <a:t> file </a:t>
-            </a:r>
-            <a:r>
-              <a:rPr lang="nl-NL" dirty="0" err="1"/>
-              <a:t>location</a:t>
-            </a:r>
-            <a:endParaRPr lang="nl-NL" dirty="0"/>
-          </a:p>
-          <a:p>
-            <a:r>
-              <a:rPr lang="nl-NL" dirty="0" err="1"/>
-              <a:t>Looking</a:t>
-            </a:r>
-            <a:r>
-              <a:rPr lang="nl-NL" dirty="0"/>
-              <a:t> up </a:t>
-            </a:r>
-            <a:r>
-              <a:rPr lang="nl-NL" dirty="0" err="1"/>
-              <a:t>playlists</a:t>
-            </a:r>
-            <a:r>
-              <a:rPr lang="nl-NL" dirty="0"/>
-              <a:t> </a:t>
-            </a:r>
-            <a:r>
-              <a:rPr lang="nl-NL" dirty="0" err="1"/>
-              <a:t>goes</a:t>
-            </a:r>
-            <a:r>
-              <a:rPr lang="nl-NL" dirty="0"/>
-              <a:t> </a:t>
-            </a:r>
-            <a:r>
-              <a:rPr lang="nl-NL" dirty="0" err="1"/>
-              <a:t>by</a:t>
-            </a:r>
-            <a:r>
-              <a:rPr lang="nl-NL" dirty="0"/>
-              <a:t> file </a:t>
-            </a:r>
-            <a:r>
-              <a:rPr lang="nl-NL" dirty="0" err="1"/>
-              <a:t>location</a:t>
-            </a:r>
-            <a:endParaRPr lang="nl-NL" dirty="0"/>
-          </a:p>
-          <a:p>
-            <a:pPr lvl="1"/>
-            <a:r>
-              <a:rPr lang="nl-NL" dirty="0" err="1"/>
-              <a:t>Better</a:t>
-            </a:r>
-            <a:r>
-              <a:rPr lang="nl-NL" dirty="0"/>
-              <a:t> store </a:t>
-            </a:r>
-            <a:r>
-              <a:rPr lang="nl-NL" dirty="0" err="1"/>
-              <a:t>them</a:t>
-            </a:r>
-            <a:r>
-              <a:rPr lang="nl-NL" dirty="0"/>
-              <a:t> </a:t>
-            </a:r>
-            <a:r>
-              <a:rPr lang="nl-NL" dirty="0" err="1"/>
-              <a:t>by</a:t>
-            </a:r>
-            <a:r>
-              <a:rPr lang="nl-NL" dirty="0"/>
-              <a:t> file </a:t>
-            </a:r>
-            <a:r>
-              <a:rPr lang="nl-NL" dirty="0" err="1"/>
-              <a:t>location</a:t>
-            </a:r>
-            <a:r>
-              <a:rPr lang="nl-NL" dirty="0"/>
-              <a:t> </a:t>
-            </a:r>
-            <a:r>
-              <a:rPr lang="nl-NL" dirty="0" err="1"/>
-              <a:t>instead</a:t>
-            </a:r>
-            <a:r>
-              <a:rPr lang="nl-NL" dirty="0"/>
-              <a:t> of audio </a:t>
-            </a:r>
-            <a:r>
-              <a:rPr lang="nl-NL" dirty="0" err="1"/>
-              <a:t>id</a:t>
-            </a:r>
-            <a:r>
-              <a:rPr lang="nl-NL" dirty="0"/>
-              <a:t> in </a:t>
-            </a:r>
-            <a:r>
-              <a:rPr lang="nl-NL" dirty="0" err="1"/>
-              <a:t>the</a:t>
-            </a:r>
-            <a:r>
-              <a:rPr lang="nl-NL" dirty="0"/>
-              <a:t> </a:t>
-            </a:r>
-            <a:r>
-              <a:rPr lang="nl-NL" dirty="0" err="1"/>
-              <a:t>dictionary</a:t>
             </a:r>
             <a:endParaRPr lang="nl-NL" dirty="0"/>
           </a:p>
@@ -4279,7 +3926,7 @@
     </p:spTree>
     <p:extLst>
       <p:ext uri="{BB962C8B-B14F-4D97-AF65-F5344CB8AC3E}">
-        <p14:creationId xmlns:p14="http://schemas.microsoft.com/office/powerpoint/2010/main" val="1101915464"/>
+        <p14:creationId xmlns:p14="http://schemas.microsoft.com/office/powerpoint/2010/main" val="2454707272"/>
       </p:ext>
     </p:extLst>
   </p:cSld>
@@ -4311,7 +3958,7 @@
           <p:cNvPr id="2" name="Title 1">
             <a:extLst>
               <a:ext uri="{FF2B5EF4-FFF2-40B4-BE49-F238E27FC236}">
-                <a16:creationId xmlns:a16="http://schemas.microsoft.com/office/drawing/2014/main" id="{FD9482D7-2C1E-974F-0684-696B5C357A21}"/>
+                <a16:creationId xmlns:a16="http://schemas.microsoft.com/office/drawing/2014/main" id="{2AA05BAC-2E44-2FC6-5951-FBBF50551D8A}"/>
               </a:ext>
             </a:extLst>
           </p:cNvPr>
@@ -4329,12 +3976,17 @@
           <a:p>
             <a:r>
               <a:rPr lang="nl-NL" dirty="0" err="1"/>
-              <a:t>Todo</a:t>
-            </a:r>
-            <a:r>
-              <a:rPr lang="nl-NL" dirty="0"/>
-              <a:t>	</a:t>
-            </a:r>
+              <a:t>Custom</a:t>
+            </a:r>
+            <a:r>
+              <a:rPr lang="nl-NL" dirty="0"/>
+              <a:t> </a:t>
+            </a:r>
+            <a:r>
+              <a:rPr lang="nl-NL" dirty="0" err="1"/>
+              <a:t>playlists</a:t>
+            </a:r>
+            <a:endParaRPr lang="nl-NL" dirty="0"/>
           </a:p>
         </p:txBody>
       </p:sp>
@@ -4343,7 +3995,7 @@
           <p:cNvPr id="3" name="Content Placeholder 2">
             <a:extLst>
               <a:ext uri="{FF2B5EF4-FFF2-40B4-BE49-F238E27FC236}">
-                <a16:creationId xmlns:a16="http://schemas.microsoft.com/office/drawing/2014/main" id="{DBE30E8A-0A74-9C39-826D-40C3B285F625}"/>
+                <a16:creationId xmlns:a16="http://schemas.microsoft.com/office/drawing/2014/main" id="{7CD73D98-DF08-C7CC-9205-3B6D67C02BAF}"/>
               </a:ext>
             </a:extLst>
           </p:cNvPr>
@@ -4361,40 +4013,146 @@
           <a:p>
             <a:r>
               <a:rPr lang="nl-NL" dirty="0"/>
-              <a:t>Fix </a:t>
-            </a:r>
-            <a:r>
-              <a:rPr lang="nl-NL" dirty="0" err="1"/>
-              <a:t>Traktor</a:t>
-            </a:r>
-            <a:r>
-              <a:rPr lang="nl-NL" dirty="0"/>
-              <a:t> </a:t>
-            </a:r>
-            <a:r>
-              <a:rPr lang="nl-NL" dirty="0" err="1"/>
-              <a:t>analyzing</a:t>
+              <a:t>We </a:t>
+            </a:r>
+            <a:r>
+              <a:rPr lang="nl-NL" dirty="0" err="1"/>
+              <a:t>now</a:t>
+            </a:r>
+            <a:r>
+              <a:rPr lang="nl-NL" dirty="0"/>
+              <a:t> </a:t>
+            </a:r>
+            <a:r>
+              <a:rPr lang="nl-NL" dirty="0" err="1"/>
+              <a:t>reload</a:t>
+            </a:r>
+            <a:r>
+              <a:rPr lang="nl-NL" dirty="0"/>
+              <a:t> </a:t>
+            </a:r>
+            <a:r>
+              <a:rPr lang="nl-NL" dirty="0" err="1"/>
+              <a:t>the</a:t>
+            </a:r>
+            <a:r>
+              <a:rPr lang="nl-NL" dirty="0"/>
+              <a:t> </a:t>
+            </a:r>
+            <a:r>
+              <a:rPr lang="nl-NL" dirty="0" err="1"/>
+              <a:t>traktor</a:t>
+            </a:r>
+            <a:r>
+              <a:rPr lang="nl-NL" dirty="0"/>
+              <a:t> </a:t>
+            </a:r>
+            <a:r>
+              <a:rPr lang="nl-NL" dirty="0" err="1"/>
+              <a:t>library</a:t>
+            </a:r>
+            <a:r>
+              <a:rPr lang="nl-NL" dirty="0"/>
+              <a:t> a new </a:t>
+            </a:r>
+            <a:r>
+              <a:rPr lang="nl-NL" dirty="0" err="1"/>
+              <a:t>each</a:t>
+            </a:r>
+            <a:r>
+              <a:rPr lang="nl-NL" dirty="0"/>
+              <a:t> time, </a:t>
+            </a:r>
+            <a:r>
+              <a:rPr lang="nl-NL" dirty="0" err="1"/>
+              <a:t>because</a:t>
+            </a:r>
+            <a:r>
+              <a:rPr lang="nl-NL" dirty="0"/>
+              <a:t> </a:t>
+            </a:r>
+            <a:r>
+              <a:rPr lang="nl-NL" dirty="0" err="1"/>
+              <a:t>it</a:t>
+            </a:r>
+            <a:r>
+              <a:rPr lang="nl-NL" dirty="0"/>
+              <a:t> is </a:t>
+            </a:r>
+            <a:r>
+              <a:rPr lang="nl-NL" dirty="0" err="1"/>
+              <a:t>fast</a:t>
+            </a:r>
+            <a:r>
+              <a:rPr lang="nl-NL" dirty="0"/>
+              <a:t>, </a:t>
+            </a:r>
+            <a:r>
+              <a:rPr lang="nl-NL" dirty="0" err="1"/>
+              <a:t>and</a:t>
+            </a:r>
+            <a:r>
+              <a:rPr lang="nl-NL" dirty="0"/>
+              <a:t> </a:t>
+            </a:r>
+            <a:r>
+              <a:rPr lang="nl-NL" dirty="0" err="1"/>
+              <a:t>loading</a:t>
+            </a:r>
+            <a:r>
+              <a:rPr lang="nl-NL" dirty="0"/>
+              <a:t> </a:t>
+            </a:r>
+            <a:r>
+              <a:rPr lang="nl-NL" dirty="0" err="1"/>
+              <a:t>from</a:t>
+            </a:r>
+            <a:r>
+              <a:rPr lang="nl-NL" dirty="0"/>
+              <a:t> </a:t>
+            </a:r>
+            <a:r>
+              <a:rPr lang="nl-NL" dirty="0" err="1"/>
+              <a:t>archive</a:t>
+            </a:r>
+            <a:r>
+              <a:rPr lang="nl-NL" dirty="0"/>
+              <a:t> </a:t>
+            </a:r>
+            <a:r>
+              <a:rPr lang="nl-NL" dirty="0" err="1"/>
+              <a:t>didnt</a:t>
+            </a:r>
+            <a:r>
+              <a:rPr lang="nl-NL" dirty="0"/>
+              <a:t> </a:t>
+            </a:r>
+            <a:r>
+              <a:rPr lang="nl-NL" dirty="0" err="1"/>
+              <a:t>work</a:t>
+            </a:r>
+            <a:r>
+              <a:rPr lang="nl-NL" dirty="0"/>
+              <a:t> </a:t>
+            </a:r>
+            <a:r>
+              <a:rPr lang="nl-NL" dirty="0" err="1"/>
+              <a:t>properly</a:t>
             </a:r>
             <a:endParaRPr lang="nl-NL" dirty="0"/>
           </a:p>
           <a:p>
             <a:r>
               <a:rPr lang="nl-NL" dirty="0"/>
-              <a:t>Download </a:t>
-            </a:r>
-            <a:r>
-              <a:rPr lang="nl-NL" dirty="0" err="1"/>
-              <a:t>remaining</a:t>
-            </a:r>
-            <a:r>
-              <a:rPr lang="nl-NL" dirty="0"/>
-              <a:t> songs</a:t>
-            </a:r>
-          </a:p>
-          <a:p>
-            <a:r>
-              <a:rPr lang="nl-NL" dirty="0"/>
-              <a:t>Make </a:t>
+              <a:t>But </a:t>
+            </a:r>
+            <a:r>
+              <a:rPr lang="nl-NL" dirty="0" err="1"/>
+              <a:t>if</a:t>
+            </a:r>
+            <a:r>
+              <a:rPr lang="nl-NL" dirty="0"/>
+              <a:t> we make </a:t>
             </a:r>
             <a:r>
               <a:rPr lang="nl-NL" dirty="0" err="1"/>
@@ -4406,26 +4164,105 @@
             </a:r>
             <a:r>
               <a:rPr lang="nl-NL" dirty="0" err="1"/>
-              <a:t>playlists</a:t>
-            </a:r>
-            <a:endParaRPr lang="nl-NL" dirty="0"/>
-          </a:p>
-          <a:p>
-            <a:r>
-              <a:rPr lang="nl-NL" dirty="0"/>
-              <a:t>Test </a:t>
-            </a:r>
-            <a:r>
-              <a:rPr lang="nl-NL" dirty="0" err="1"/>
-              <a:t>not-forced</a:t>
-            </a:r>
-            <a:r>
-              <a:rPr lang="nl-NL" dirty="0"/>
-              <a:t> </a:t>
-            </a:r>
-            <a:r>
-              <a:rPr lang="nl-NL" dirty="0" err="1"/>
-              <a:t>loading</a:t>
+              <a:t>playlist</a:t>
+            </a:r>
+            <a:r>
+              <a:rPr lang="nl-NL" dirty="0"/>
+              <a:t>, we </a:t>
+            </a:r>
+            <a:r>
+              <a:rPr lang="nl-NL" dirty="0" err="1"/>
+              <a:t>also</a:t>
+            </a:r>
+            <a:r>
+              <a:rPr lang="nl-NL" dirty="0"/>
+              <a:t> </a:t>
+            </a:r>
+            <a:r>
+              <a:rPr lang="nl-NL" dirty="0" err="1"/>
+              <a:t>need</a:t>
+            </a:r>
+            <a:r>
+              <a:rPr lang="nl-NL" dirty="0"/>
+              <a:t> </a:t>
+            </a:r>
+            <a:r>
+              <a:rPr lang="nl-NL" dirty="0" err="1"/>
+              <a:t>to</a:t>
+            </a:r>
+            <a:r>
+              <a:rPr lang="nl-NL" dirty="0"/>
+              <a:t> store </a:t>
+            </a:r>
+            <a:r>
+              <a:rPr lang="nl-NL" dirty="0" err="1"/>
+              <a:t>and</a:t>
+            </a:r>
+            <a:r>
+              <a:rPr lang="nl-NL" dirty="0"/>
+              <a:t> </a:t>
+            </a:r>
+            <a:r>
+              <a:rPr lang="nl-NL" dirty="0" err="1"/>
+              <a:t>retrieve</a:t>
+            </a:r>
+            <a:r>
+              <a:rPr lang="nl-NL" dirty="0"/>
+              <a:t> </a:t>
+            </a:r>
+            <a:r>
+              <a:rPr lang="nl-NL" dirty="0" err="1"/>
+              <a:t>those</a:t>
+            </a:r>
+            <a:r>
+              <a:rPr lang="nl-NL" dirty="0"/>
+              <a:t> -&gt; DONE</a:t>
+            </a:r>
+          </a:p>
+          <a:p>
+            <a:r>
+              <a:rPr lang="nl-NL" dirty="0" err="1"/>
+              <a:t>Loading</a:t>
+            </a:r>
+            <a:r>
+              <a:rPr lang="nl-NL" dirty="0"/>
+              <a:t> tracks </a:t>
+            </a:r>
+            <a:r>
+              <a:rPr lang="nl-NL" dirty="0" err="1"/>
+              <a:t>to</a:t>
+            </a:r>
+            <a:r>
+              <a:rPr lang="nl-NL" dirty="0"/>
+              <a:t> a </a:t>
+            </a:r>
+            <a:r>
+              <a:rPr lang="nl-NL" dirty="0" err="1"/>
+              <a:t>playlist</a:t>
+            </a:r>
+            <a:r>
+              <a:rPr lang="nl-NL" dirty="0"/>
+              <a:t>, </a:t>
+            </a:r>
+            <a:r>
+              <a:rPr lang="nl-NL" dirty="0" err="1"/>
+              <a:t>see</a:t>
+            </a:r>
+            <a:r>
+              <a:rPr lang="nl-NL" dirty="0"/>
+              <a:t> next slide </a:t>
+            </a:r>
+            <a:r>
+              <a:rPr lang="nl-NL" dirty="0" err="1"/>
+              <a:t>for</a:t>
+            </a:r>
+            <a:r>
+              <a:rPr lang="nl-NL" dirty="0"/>
+              <a:t> </a:t>
+            </a:r>
+            <a:r>
+              <a:rPr lang="nl-NL" dirty="0" err="1"/>
+              <a:t>ideas</a:t>
             </a:r>
             <a:endParaRPr lang="nl-NL" dirty="0"/>
           </a:p>
@@ -4434,7 +4271,406 @@
     </p:spTree>
     <p:extLst>
       <p:ext uri="{BB962C8B-B14F-4D97-AF65-F5344CB8AC3E}">
-        <p14:creationId xmlns:p14="http://schemas.microsoft.com/office/powerpoint/2010/main" val="2454707272"/>
+        <p14:creationId xmlns:p14="http://schemas.microsoft.com/office/powerpoint/2010/main" val="3938820725"/>
+      </p:ext>
+    </p:extLst>
+  </p:cSld>
+  <p:clrMapOvr>
+    <a:masterClrMapping/>
+  </p:clrMapOvr>
+</p:sld>
+</file>
+
+<file path=ppt/slides/slide12.xml><?xml version="1.0" encoding="utf-8"?>
+<p:sld xmlns:a="http://schemas.openxmlformats.org/drawingml/2006/main" xmlns:r="http://schemas.openxmlformats.org/officeDocument/2006/relationships" xmlns:p="http://schemas.openxmlformats.org/presentationml/2006/main">
+  <p:cSld>
+    <p:spTree>
+      <p:nvGrpSpPr>
+        <p:cNvPr id="1" name=""/>
+        <p:cNvGrpSpPr/>
+        <p:nvPr/>
+      </p:nvGrpSpPr>
+      <p:grpSpPr>
+        <a:xfrm>
+          <a:off x="0" y="0"/>
+          <a:ext cx="0" cy="0"/>
+          <a:chOff x="0" y="0"/>
+          <a:chExt cx="0" cy="0"/>
+        </a:xfrm>
+      </p:grpSpPr>
+      <p:sp>
+        <p:nvSpPr>
+          <p:cNvPr id="2" name="Title 1">
+            <a:extLst>
+              <a:ext uri="{FF2B5EF4-FFF2-40B4-BE49-F238E27FC236}">
+                <a16:creationId xmlns:a16="http://schemas.microsoft.com/office/drawing/2014/main" id="{9F4B8471-482C-8AA4-429C-DE36E866B4A6}"/>
+              </a:ext>
+            </a:extLst>
+          </p:cNvPr>
+          <p:cNvSpPr>
+            <a:spLocks noGrp="1"/>
+          </p:cNvSpPr>
+          <p:nvPr>
+            <p:ph type="title"/>
+          </p:nvPr>
+        </p:nvSpPr>
+        <p:spPr/>
+        <p:txBody>
+          <a:bodyPr/>
+          <a:lstStyle/>
+          <a:p>
+            <a:endParaRPr lang="nl-NL"/>
+          </a:p>
+        </p:txBody>
+      </p:sp>
+      <p:sp>
+        <p:nvSpPr>
+          <p:cNvPr id="3" name="Content Placeholder 2">
+            <a:extLst>
+              <a:ext uri="{FF2B5EF4-FFF2-40B4-BE49-F238E27FC236}">
+                <a16:creationId xmlns:a16="http://schemas.microsoft.com/office/drawing/2014/main" id="{8FB4B866-B5FA-A8A9-F05B-A190414D46C0}"/>
+              </a:ext>
+            </a:extLst>
+          </p:cNvPr>
+          <p:cNvSpPr>
+            <a:spLocks noGrp="1"/>
+          </p:cNvSpPr>
+          <p:nvPr>
+            <p:ph idx="1"/>
+          </p:nvPr>
+        </p:nvSpPr>
+        <p:spPr/>
+        <p:txBody>
+          <a:bodyPr/>
+          <a:lstStyle/>
+          <a:p>
+            <a:r>
+              <a:rPr lang="nl-NL" dirty="0"/>
+              <a:t>Shift button is </a:t>
+            </a:r>
+            <a:r>
+              <a:rPr lang="nl-NL" dirty="0" err="1"/>
+              <a:t>specific</a:t>
+            </a:r>
+            <a:r>
+              <a:rPr lang="nl-NL" dirty="0"/>
+              <a:t> </a:t>
+            </a:r>
+            <a:r>
+              <a:rPr lang="nl-NL" dirty="0" err="1"/>
+              <a:t>for</a:t>
+            </a:r>
+            <a:r>
+              <a:rPr lang="nl-NL" dirty="0"/>
+              <a:t> </a:t>
+            </a:r>
+            <a:r>
+              <a:rPr lang="nl-NL" dirty="0" err="1"/>
+              <a:t>each</a:t>
+            </a:r>
+            <a:r>
+              <a:rPr lang="nl-NL" dirty="0"/>
+              <a:t> deck; </a:t>
+            </a:r>
+            <a:r>
+              <a:rPr lang="nl-NL" dirty="0" err="1"/>
+              <a:t>loading</a:t>
+            </a:r>
+            <a:r>
+              <a:rPr lang="nl-NL" dirty="0"/>
+              <a:t> </a:t>
+            </a:r>
+            <a:r>
+              <a:rPr lang="nl-NL" dirty="0" err="1"/>
+              <a:t>to</a:t>
+            </a:r>
+            <a:r>
+              <a:rPr lang="nl-NL" dirty="0"/>
+              <a:t> a </a:t>
+            </a:r>
+            <a:r>
+              <a:rPr lang="nl-NL" dirty="0" err="1"/>
+              <a:t>playlist</a:t>
+            </a:r>
+            <a:r>
+              <a:rPr lang="nl-NL" dirty="0"/>
+              <a:t> </a:t>
+            </a:r>
+            <a:r>
+              <a:rPr lang="nl-NL" dirty="0" err="1"/>
+              <a:t>from</a:t>
+            </a:r>
+            <a:r>
+              <a:rPr lang="nl-NL" dirty="0"/>
+              <a:t> deck, </a:t>
+            </a:r>
+            <a:r>
+              <a:rPr lang="nl-NL" dirty="0" err="1"/>
+              <a:t>by</a:t>
+            </a:r>
+            <a:r>
+              <a:rPr lang="nl-NL" dirty="0"/>
+              <a:t> shift + scan</a:t>
+            </a:r>
+          </a:p>
+          <a:p>
+            <a:r>
+              <a:rPr lang="nl-NL" dirty="0" err="1"/>
+              <a:t>Requirements</a:t>
+            </a:r>
+            <a:endParaRPr lang="nl-NL" dirty="0"/>
+          </a:p>
+          <a:p>
+            <a:pPr lvl="1"/>
+            <a:r>
+              <a:rPr lang="nl-NL" dirty="0" err="1"/>
+              <a:t>Seperate</a:t>
+            </a:r>
+            <a:r>
+              <a:rPr lang="nl-NL" dirty="0"/>
+              <a:t> shift variables </a:t>
+            </a:r>
+            <a:r>
+              <a:rPr lang="nl-NL" dirty="0" err="1"/>
+              <a:t>for</a:t>
+            </a:r>
+            <a:r>
+              <a:rPr lang="nl-NL" dirty="0"/>
+              <a:t> </a:t>
+            </a:r>
+            <a:r>
+              <a:rPr lang="nl-NL" dirty="0" err="1"/>
+              <a:t>each</a:t>
+            </a:r>
+            <a:r>
+              <a:rPr lang="nl-NL" dirty="0"/>
+              <a:t> deck DONE</a:t>
+            </a:r>
+          </a:p>
+          <a:p>
+            <a:pPr lvl="1"/>
+            <a:r>
+              <a:rPr lang="nl-NL" dirty="0"/>
+              <a:t>A </a:t>
+            </a:r>
+            <a:r>
+              <a:rPr lang="nl-NL" dirty="0" err="1"/>
+              <a:t>method</a:t>
+            </a:r>
+            <a:r>
+              <a:rPr lang="nl-NL" dirty="0"/>
+              <a:t> </a:t>
+            </a:r>
+            <a:r>
+              <a:rPr lang="nl-NL" dirty="0" err="1"/>
+              <a:t>addTrack</a:t>
+            </a:r>
+            <a:r>
+              <a:rPr lang="nl-NL" dirty="0"/>
+              <a:t> </a:t>
+            </a:r>
+            <a:r>
+              <a:rPr lang="nl-NL" dirty="0" err="1"/>
+              <a:t>for</a:t>
+            </a:r>
+            <a:r>
+              <a:rPr lang="nl-NL" dirty="0"/>
+              <a:t> </a:t>
+            </a:r>
+            <a:r>
+              <a:rPr lang="nl-NL" dirty="0" err="1"/>
+              <a:t>the</a:t>
+            </a:r>
+            <a:r>
+              <a:rPr lang="nl-NL" dirty="0"/>
+              <a:t> </a:t>
+            </a:r>
+            <a:r>
+              <a:rPr lang="nl-NL" dirty="0" err="1"/>
+              <a:t>playlist</a:t>
+            </a:r>
+            <a:r>
+              <a:rPr lang="nl-NL"/>
+              <a:t> class DONE</a:t>
+            </a:r>
+            <a:endParaRPr lang="nl-NL" dirty="0"/>
+          </a:p>
+          <a:p>
+            <a:pPr lvl="1"/>
+            <a:r>
+              <a:rPr lang="nl-NL" dirty="0"/>
+              <a:t>A </a:t>
+            </a:r>
+            <a:r>
+              <a:rPr lang="nl-NL" dirty="0" err="1"/>
+              <a:t>psysical</a:t>
+            </a:r>
+            <a:r>
+              <a:rPr lang="nl-NL" dirty="0"/>
+              <a:t> interface at </a:t>
+            </a:r>
+            <a:r>
+              <a:rPr lang="nl-NL" dirty="0" err="1"/>
+              <a:t>the</a:t>
+            </a:r>
+            <a:r>
+              <a:rPr lang="nl-NL" dirty="0"/>
+              <a:t> barcode scanner, </a:t>
+            </a:r>
+            <a:r>
+              <a:rPr lang="nl-NL" dirty="0" err="1"/>
+              <a:t>for</a:t>
+            </a:r>
+            <a:r>
+              <a:rPr lang="nl-NL" dirty="0"/>
+              <a:t> </a:t>
+            </a:r>
+            <a:r>
+              <a:rPr lang="nl-NL" dirty="0" err="1"/>
+              <a:t>each</a:t>
+            </a:r>
+            <a:r>
+              <a:rPr lang="nl-NL" dirty="0"/>
+              <a:t> deck, on </a:t>
+            </a:r>
+            <a:r>
+              <a:rPr lang="nl-NL" dirty="0" err="1"/>
+              <a:t>condition</a:t>
+            </a:r>
+            <a:r>
+              <a:rPr lang="nl-NL" dirty="0"/>
+              <a:t> of shift, </a:t>
+            </a:r>
+            <a:r>
+              <a:rPr lang="nl-NL" dirty="0" err="1"/>
+              <a:t>to</a:t>
+            </a:r>
+            <a:r>
+              <a:rPr lang="nl-NL" dirty="0"/>
+              <a:t> </a:t>
+            </a:r>
+            <a:r>
+              <a:rPr lang="nl-NL" dirty="0" err="1"/>
+              <a:t>add</a:t>
+            </a:r>
+            <a:r>
+              <a:rPr lang="nl-NL" dirty="0"/>
+              <a:t> track </a:t>
+            </a:r>
+            <a:r>
+              <a:rPr lang="nl-NL" dirty="0" err="1"/>
+              <a:t>from</a:t>
+            </a:r>
+            <a:r>
+              <a:rPr lang="nl-NL" dirty="0"/>
+              <a:t> deck </a:t>
+            </a:r>
+            <a:r>
+              <a:rPr lang="nl-NL" dirty="0" err="1"/>
+              <a:t>to</a:t>
+            </a:r>
+            <a:r>
+              <a:rPr lang="nl-NL" dirty="0"/>
+              <a:t> </a:t>
+            </a:r>
+            <a:r>
+              <a:rPr lang="nl-NL" dirty="0" err="1"/>
+              <a:t>playlist</a:t>
+            </a:r>
+            <a:endParaRPr lang="nl-NL" dirty="0"/>
+          </a:p>
+        </p:txBody>
+      </p:sp>
+    </p:spTree>
+    <p:extLst>
+      <p:ext uri="{BB962C8B-B14F-4D97-AF65-F5344CB8AC3E}">
+        <p14:creationId xmlns:p14="http://schemas.microsoft.com/office/powerpoint/2010/main" val="4223598442"/>
+      </p:ext>
+    </p:extLst>
+  </p:cSld>
+  <p:clrMapOvr>
+    <a:masterClrMapping/>
+  </p:clrMapOvr>
+</p:sld>
+</file>
+
+<file path=ppt/slides/slide13.xml><?xml version="1.0" encoding="utf-8"?>
+<p:sld xmlns:a="http://schemas.openxmlformats.org/drawingml/2006/main" xmlns:r="http://schemas.openxmlformats.org/officeDocument/2006/relationships" xmlns:p="http://schemas.openxmlformats.org/presentationml/2006/main">
+  <p:cSld>
+    <p:spTree>
+      <p:nvGrpSpPr>
+        <p:cNvPr id="1" name=""/>
+        <p:cNvGrpSpPr/>
+        <p:nvPr/>
+      </p:nvGrpSpPr>
+      <p:grpSpPr>
+        <a:xfrm>
+          <a:off x="0" y="0"/>
+          <a:ext cx="0" cy="0"/>
+          <a:chOff x="0" y="0"/>
+          <a:chExt cx="0" cy="0"/>
+        </a:xfrm>
+      </p:grpSpPr>
+      <p:sp>
+        <p:nvSpPr>
+          <p:cNvPr id="2" name="Title 1">
+            <a:extLst>
+              <a:ext uri="{FF2B5EF4-FFF2-40B4-BE49-F238E27FC236}">
+                <a16:creationId xmlns:a16="http://schemas.microsoft.com/office/drawing/2014/main" id="{8D1412DB-EDB0-A4A2-4A8E-2FD70B7463F1}"/>
+              </a:ext>
+            </a:extLst>
+          </p:cNvPr>
+          <p:cNvSpPr>
+            <a:spLocks noGrp="1"/>
+          </p:cNvSpPr>
+          <p:nvPr>
+            <p:ph type="title"/>
+          </p:nvPr>
+        </p:nvSpPr>
+        <p:spPr/>
+        <p:txBody>
+          <a:bodyPr/>
+          <a:lstStyle/>
+          <a:p>
+            <a:r>
+              <a:rPr lang="nl-NL" dirty="0"/>
+              <a:t>Barcode</a:t>
+            </a:r>
+          </a:p>
+        </p:txBody>
+      </p:sp>
+      <p:sp>
+        <p:nvSpPr>
+          <p:cNvPr id="3" name="Content Placeholder 2">
+            <a:extLst>
+              <a:ext uri="{FF2B5EF4-FFF2-40B4-BE49-F238E27FC236}">
+                <a16:creationId xmlns:a16="http://schemas.microsoft.com/office/drawing/2014/main" id="{E1AA2F3D-F09C-1945-2471-AF211C8A5C33}"/>
+              </a:ext>
+            </a:extLst>
+          </p:cNvPr>
+          <p:cNvSpPr>
+            <a:spLocks noGrp="1"/>
+          </p:cNvSpPr>
+          <p:nvPr>
+            <p:ph idx="1"/>
+          </p:nvPr>
+        </p:nvSpPr>
+        <p:spPr/>
+        <p:txBody>
+          <a:bodyPr/>
+          <a:lstStyle/>
+          <a:p>
+            <a:r>
+              <a:rPr lang="nl-NL"/>
+              <a:t>EAN13</a:t>
+            </a:r>
+          </a:p>
+        </p:txBody>
+      </p:sp>
+    </p:spTree>
+    <p:extLst>
+      <p:ext uri="{BB962C8B-B14F-4D97-AF65-F5344CB8AC3E}">
+        <p14:creationId xmlns:p14="http://schemas.microsoft.com/office/powerpoint/2010/main" val="20252145"/>
       </p:ext>
     </p:extLst>
   </p:cSld>
@@ -6696,14 +6932,14 @@
           <p:nvPr>
             <p:extLst>
               <p:ext uri="{D42A27DB-BD31-4B8C-83A1-F6EECF244321}">
-                <p14:modId xmlns:p14="http://schemas.microsoft.com/office/powerpoint/2010/main" val="1113962394"/>
+                <p14:modId xmlns:p14="http://schemas.microsoft.com/office/powerpoint/2010/main" val="2957816021"/>
               </p:ext>
             </p:extLst>
           </p:nvPr>
         </p:nvGraphicFramePr>
         <p:xfrm>
           <a:off x="5168392" y="228600"/>
-          <a:ext cx="6599936" cy="6400800"/>
+          <a:ext cx="6599936" cy="6268284"/>
         </p:xfrm>
         <a:graphic>
           <a:graphicData uri="http://schemas.openxmlformats.org/drawingml/2006/table">
@@ -6727,14 +6963,14 @@
                   </a:extLst>
                 </a:gridCol>
               </a:tblGrid>
-              <a:tr h="288000">
+              <a:tr h="284922">
                 <a:tc>
                   <a:txBody>
                     <a:bodyPr/>
                     <a:lstStyle/>
                     <a:p>
                       <a:r>
-                        <a:rPr lang="nl-NL" sz="1400" dirty="0"/>
+                        <a:rPr lang="nl-NL" sz="1200" dirty="0"/>
                         <a:t>UUID</a:t>
                       </a:r>
                     </a:p>
@@ -6747,7 +6983,7 @@
                     <a:lstStyle/>
                     <a:p>
                       <a:r>
-                        <a:rPr lang="nl-NL" sz="1400" dirty="0"/>
+                        <a:rPr lang="nl-NL" sz="1200" dirty="0"/>
                         <a:t>Name</a:t>
                       </a:r>
                     </a:p>
@@ -6760,14 +6996,52 @@
                   </a:ext>
                 </a:extLst>
               </a:tr>
-              <a:tr h="304800">
+              <a:tr h="284922">
                 <a:tc>
                   <a:txBody>
                     <a:bodyPr/>
                     <a:lstStyle/>
                     <a:p>
                       <a:r>
-                        <a:rPr lang="nl-NL" sz="1050" dirty="0"/>
+                        <a:rPr lang="nl-NL" sz="1000" dirty="0"/>
+                        <a:t>7375646A7375646A416C6C7375646A7375646A</a:t>
+                      </a:r>
+                    </a:p>
+                  </a:txBody>
+                  <a:tcPr marL="51802" marR="51802" marT="25901" marB="25901" anchor="ctr"/>
+                </a:tc>
+                <a:tc>
+                  <a:txBody>
+                    <a:bodyPr/>
+                    <a:lstStyle/>
+                    <a:p>
+                      <a:r>
+                        <a:rPr lang="nl-NL" sz="1200" dirty="0"/>
+                        <a:t>Special – </a:t>
+                      </a:r>
+                      <a:r>
+                        <a:rPr lang="nl-NL" sz="1200" dirty="0" err="1"/>
+                        <a:t>All</a:t>
+                      </a:r>
+                      <a:endParaRPr lang="nl-NL" sz="1200" dirty="0"/>
+                    </a:p>
+                  </a:txBody>
+                  <a:tcPr/>
+                </a:tc>
+                <a:extLst>
+                  <a:ext uri="{0D108BD9-81ED-4DB2-BD59-A6C34878D82A}">
+                    <a16:rowId xmlns:a16="http://schemas.microsoft.com/office/drawing/2014/main" val="976845468"/>
+                  </a:ext>
+                </a:extLst>
+              </a:tr>
+              <a:tr h="284922">
+                <a:tc>
+                  <a:txBody>
+                    <a:bodyPr/>
+                    <a:lstStyle/>
+                    <a:p>
+                      <a:r>
+                        <a:rPr lang="nl-NL" sz="1000" dirty="0"/>
                         <a:t>1e0f57a1b3d24d0cbd5e6ffb5e37359f</a:t>
                       </a:r>
                     </a:p>
@@ -6779,25 +7053,36 @@
                     <a:bodyPr/>
                     <a:lstStyle/>
                     <a:p>
-                      <a:endParaRPr lang="nl-NL" sz="1400" dirty="0"/>
+                      <a:r>
+                        <a:rPr lang="nl-NL" sz="1200" dirty="0"/>
+                        <a:t>Special – </a:t>
+                      </a:r>
+                      <a:r>
+                        <a:rPr lang="nl-NL" sz="1200" dirty="0" err="1"/>
+                        <a:t>Session</a:t>
+                      </a:r>
+                      <a:r>
+                        <a:rPr lang="nl-NL" sz="1200" dirty="0"/>
+                        <a:t> </a:t>
+                      </a:r>
                     </a:p>
                   </a:txBody>
                   <a:tcPr/>
                 </a:tc>
                 <a:extLst>
                   <a:ext uri="{0D108BD9-81ED-4DB2-BD59-A6C34878D82A}">
-                    <a16:rowId xmlns:a16="http://schemas.microsoft.com/office/drawing/2014/main" val="1809024299"/>
+                    <a16:rowId xmlns:a16="http://schemas.microsoft.com/office/drawing/2014/main" val="1245323655"/>
                   </a:ext>
                 </a:extLst>
               </a:tr>
-              <a:tr h="304800">
+              <a:tr h="284922">
                 <a:tc>
                   <a:txBody>
                     <a:bodyPr/>
                     <a:lstStyle/>
                     <a:p>
                       <a:r>
-                        <a:rPr lang="nl-NL" sz="1050" dirty="0"/>
+                        <a:rPr lang="nl-NL" sz="1000" dirty="0"/>
                         <a:t>3e4fdbaedb7a4087bbd6a67c276a1b89</a:t>
                       </a:r>
                     </a:p>
@@ -6809,7 +7094,10 @@
                     <a:bodyPr/>
                     <a:lstStyle/>
                     <a:p>
-                      <a:endParaRPr lang="nl-NL" sz="1400" dirty="0"/>
+                      <a:r>
+                        <a:rPr lang="nl-NL" sz="1200" dirty="0"/>
+                        <a:t>Opening 1</a:t>
+                      </a:r>
                     </a:p>
                   </a:txBody>
                   <a:tcPr/>
@@ -6820,14 +7108,14 @@
                   </a:ext>
                 </a:extLst>
               </a:tr>
-              <a:tr h="304800">
+              <a:tr h="284922">
                 <a:tc>
                   <a:txBody>
                     <a:bodyPr/>
                     <a:lstStyle/>
                     <a:p>
                       <a:r>
-                        <a:rPr lang="nl-NL" sz="1050" dirty="0"/>
+                        <a:rPr lang="nl-NL" sz="1000" dirty="0"/>
                         <a:t>d1b663b69d374d91b7a59a7bce27413b</a:t>
                       </a:r>
                     </a:p>
@@ -6839,7 +7127,10 @@
                     <a:bodyPr/>
                     <a:lstStyle/>
                     <a:p>
-                      <a:endParaRPr lang="nl-NL" sz="1400"/>
+                      <a:r>
+                        <a:rPr lang="nl-NL" sz="1200" dirty="0"/>
+                        <a:t>Opening 2</a:t>
+                      </a:r>
                     </a:p>
                   </a:txBody>
                   <a:tcPr/>
@@ -6850,14 +7141,14 @@
                   </a:ext>
                 </a:extLst>
               </a:tr>
-              <a:tr h="304800">
+              <a:tr h="284922">
                 <a:tc>
                   <a:txBody>
                     <a:bodyPr/>
                     <a:lstStyle/>
                     <a:p>
                       <a:r>
-                        <a:rPr lang="nl-NL" sz="1050" dirty="0"/>
+                        <a:rPr lang="nl-NL" sz="1000" dirty="0"/>
                         <a:t>33d1c4e9c937404086768998f384e44f</a:t>
                       </a:r>
                     </a:p>
@@ -6869,7 +7160,10 @@
                     <a:bodyPr/>
                     <a:lstStyle/>
                     <a:p>
-                      <a:endParaRPr lang="nl-NL" sz="1400"/>
+                      <a:r>
+                        <a:rPr lang="nl-NL" sz="1200" dirty="0"/>
+                        <a:t>Opening 3</a:t>
+                      </a:r>
                     </a:p>
                   </a:txBody>
                   <a:tcPr/>
@@ -6880,14 +7174,14 @@
                   </a:ext>
                 </a:extLst>
               </a:tr>
-              <a:tr h="304800">
+              <a:tr h="284922">
                 <a:tc>
                   <a:txBody>
                     <a:bodyPr/>
                     <a:lstStyle/>
                     <a:p>
                       <a:r>
-                        <a:rPr lang="nl-NL" sz="1050" dirty="0"/>
+                        <a:rPr lang="nl-NL" sz="1000" dirty="0"/>
                         <a:t>0ceffb32db8048b4b51f8301b70f296e</a:t>
                       </a:r>
                     </a:p>
@@ -6899,7 +7193,10 @@
                     <a:bodyPr/>
                     <a:lstStyle/>
                     <a:p>
-                      <a:endParaRPr lang="nl-NL" sz="1400"/>
+                      <a:r>
+                        <a:rPr lang="nl-NL" sz="1200" dirty="0"/>
+                        <a:t>Opening 4</a:t>
+                      </a:r>
                     </a:p>
                   </a:txBody>
                   <a:tcPr/>
@@ -6910,14 +7207,14 @@
                   </a:ext>
                 </a:extLst>
               </a:tr>
-              <a:tr h="304800">
+              <a:tr h="284922">
                 <a:tc>
                   <a:txBody>
                     <a:bodyPr/>
                     <a:lstStyle/>
                     <a:p>
                       <a:r>
-                        <a:rPr lang="nl-NL" sz="1050" dirty="0"/>
+                        <a:rPr lang="nl-NL" sz="1000" dirty="0"/>
                         <a:t>fc4cb05b5da442e983019388a2b8e3c5</a:t>
                       </a:r>
                     </a:p>
@@ -6929,7 +7226,10 @@
                     <a:bodyPr/>
                     <a:lstStyle/>
                     <a:p>
-                      <a:endParaRPr lang="nl-NL" sz="1400" dirty="0"/>
+                      <a:r>
+                        <a:rPr lang="nl-NL" sz="1200" dirty="0"/>
+                        <a:t>Opening 5</a:t>
+                      </a:r>
                     </a:p>
                   </a:txBody>
                   <a:tcPr/>
@@ -6940,14 +7240,14 @@
                   </a:ext>
                 </a:extLst>
               </a:tr>
-              <a:tr h="304800">
+              <a:tr h="284922">
                 <a:tc>
                   <a:txBody>
                     <a:bodyPr/>
                     <a:lstStyle/>
                     <a:p>
                       <a:r>
-                        <a:rPr lang="nl-NL" sz="1050" dirty="0"/>
+                        <a:rPr lang="nl-NL" sz="1000" dirty="0"/>
                         <a:t>7eb4c269c3644c0ba1bfe2a62a57db9f</a:t>
                       </a:r>
                     </a:p>
@@ -6959,7 +7259,10 @@
                     <a:bodyPr/>
                     <a:lstStyle/>
                     <a:p>
-                      <a:endParaRPr lang="nl-NL" sz="1400" dirty="0"/>
+                      <a:r>
+                        <a:rPr lang="nl-NL" sz="1200" dirty="0"/>
+                        <a:t>Opening 6</a:t>
+                      </a:r>
                     </a:p>
                   </a:txBody>
                   <a:tcPr/>
@@ -6970,14 +7273,14 @@
                   </a:ext>
                 </a:extLst>
               </a:tr>
-              <a:tr h="304800">
+              <a:tr h="284922">
                 <a:tc>
                   <a:txBody>
                     <a:bodyPr/>
                     <a:lstStyle/>
                     <a:p>
                       <a:r>
-                        <a:rPr lang="nl-NL" sz="1050" dirty="0"/>
+                        <a:rPr lang="nl-NL" sz="1000" dirty="0"/>
                         <a:t>4173cbf5574f4b92827a2d51e7b7d6ed</a:t>
                       </a:r>
                     </a:p>
@@ -6989,7 +7292,10 @@
                     <a:bodyPr/>
                     <a:lstStyle/>
                     <a:p>
-                      <a:endParaRPr lang="nl-NL" sz="1400" dirty="0"/>
+                      <a:r>
+                        <a:rPr lang="nl-NL" sz="1200" dirty="0"/>
+                        <a:t>Opening 7</a:t>
+                      </a:r>
                     </a:p>
                   </a:txBody>
                   <a:tcPr/>
@@ -7000,14 +7306,14 @@
                   </a:ext>
                 </a:extLst>
               </a:tr>
-              <a:tr h="304800">
+              <a:tr h="284922">
                 <a:tc>
                   <a:txBody>
                     <a:bodyPr/>
                     <a:lstStyle/>
                     <a:p>
                       <a:r>
-                        <a:rPr lang="nl-NL" sz="1050" dirty="0"/>
+                        <a:rPr lang="nl-NL" sz="1000" dirty="0"/>
                         <a:t>1e256130a8ff43c8844a8d3d56f37a71</a:t>
                       </a:r>
                     </a:p>
@@ -7019,7 +7325,10 @@
                     <a:bodyPr/>
                     <a:lstStyle/>
                     <a:p>
-                      <a:endParaRPr lang="nl-NL" sz="1400" dirty="0"/>
+                      <a:r>
+                        <a:rPr lang="nl-NL" sz="1200" dirty="0"/>
+                        <a:t>Opening 8</a:t>
+                      </a:r>
                     </a:p>
                   </a:txBody>
                   <a:tcPr/>
@@ -7030,14 +7339,14 @@
                   </a:ext>
                 </a:extLst>
               </a:tr>
-              <a:tr h="304800">
+              <a:tr h="284922">
                 <a:tc>
                   <a:txBody>
                     <a:bodyPr/>
                     <a:lstStyle/>
                     <a:p>
                       <a:r>
-                        <a:rPr lang="nl-NL" sz="1050" dirty="0"/>
+                        <a:rPr lang="nl-NL" sz="1000" dirty="0"/>
                         <a:t>dcbe7e16fbc54a88b6a29339bfcaf0d9</a:t>
                       </a:r>
                     </a:p>
@@ -7049,7 +7358,10 @@
                     <a:bodyPr/>
                     <a:lstStyle/>
                     <a:p>
-                      <a:endParaRPr lang="nl-NL" sz="1400" dirty="0"/>
+                      <a:r>
+                        <a:rPr lang="nl-NL" sz="1200" dirty="0"/>
+                        <a:t>Opening 9</a:t>
+                      </a:r>
                     </a:p>
                   </a:txBody>
                   <a:tcPr/>
@@ -7060,14 +7372,14 @@
                   </a:ext>
                 </a:extLst>
               </a:tr>
-              <a:tr h="304800">
+              <a:tr h="284922">
                 <a:tc>
                   <a:txBody>
                     <a:bodyPr/>
                     <a:lstStyle/>
                     <a:p>
                       <a:r>
-                        <a:rPr lang="nl-NL" sz="1050" dirty="0"/>
+                        <a:rPr lang="nl-NL" sz="1000" dirty="0"/>
                         <a:t>5e180153c08445f7bff4f81c157f3de7</a:t>
                       </a:r>
                     </a:p>
@@ -7079,7 +7391,14 @@
                     <a:bodyPr/>
                     <a:lstStyle/>
                     <a:p>
-                      <a:endParaRPr lang="nl-NL" sz="1400" dirty="0"/>
+                      <a:r>
+                        <a:rPr lang="nl-NL" sz="1200" dirty="0" err="1"/>
+                        <a:t>To</a:t>
+                      </a:r>
+                      <a:r>
+                        <a:rPr lang="nl-NL" sz="1200" dirty="0"/>
+                        <a:t> delete</a:t>
+                      </a:r>
                     </a:p>
                   </a:txBody>
                   <a:tcPr/>
@@ -7090,14 +7409,14 @@
                   </a:ext>
                 </a:extLst>
               </a:tr>
-              <a:tr h="304800">
+              <a:tr h="284922">
                 <a:tc>
                   <a:txBody>
                     <a:bodyPr/>
                     <a:lstStyle/>
                     <a:p>
                       <a:r>
-                        <a:rPr lang="nl-NL" sz="1050" dirty="0"/>
+                        <a:rPr lang="nl-NL" sz="1000" dirty="0"/>
                         <a:t>a3a0df06dbd54069ae2380045b5eb6d4</a:t>
                       </a:r>
                     </a:p>
@@ -7109,7 +7428,19 @@
                     <a:bodyPr/>
                     <a:lstStyle/>
                     <a:p>
-                      <a:endParaRPr lang="nl-NL" sz="1400" dirty="0"/>
+                      <a:r>
+                        <a:rPr lang="nl-NL" sz="1200" dirty="0" err="1"/>
+                        <a:t>Senking</a:t>
+                      </a:r>
+                      <a:r>
+                        <a:rPr lang="nl-NL" sz="1200" dirty="0"/>
+                        <a:t> -&gt; </a:t>
+                      </a:r>
+                      <a:r>
+                        <a:rPr lang="nl-NL" sz="1200" dirty="0" err="1"/>
+                        <a:t>Artbat</a:t>
+                      </a:r>
+                      <a:endParaRPr lang="nl-NL" sz="1200" dirty="0"/>
                     </a:p>
                   </a:txBody>
                   <a:tcPr/>
@@ -7120,14 +7451,14 @@
                   </a:ext>
                 </a:extLst>
               </a:tr>
-              <a:tr h="304800">
+              <a:tr h="284922">
                 <a:tc>
                   <a:txBody>
                     <a:bodyPr/>
                     <a:lstStyle/>
                     <a:p>
                       <a:r>
-                        <a:rPr lang="nl-NL" sz="1050" dirty="0"/>
+                        <a:rPr lang="nl-NL" sz="1000" dirty="0"/>
                         <a:t>f0f86c15c3a940e9a3c93b4a66d3f37d</a:t>
                       </a:r>
                     </a:p>
@@ -7139,7 +7470,7 @@
                     <a:bodyPr/>
                     <a:lstStyle/>
                     <a:p>
-                      <a:endParaRPr lang="nl-NL" sz="1400" dirty="0"/>
+                      <a:endParaRPr lang="nl-NL" sz="1200" dirty="0"/>
                     </a:p>
                   </a:txBody>
                   <a:tcPr/>
@@ -7150,14 +7481,14 @@
                   </a:ext>
                 </a:extLst>
               </a:tr>
-              <a:tr h="304800">
+              <a:tr h="284922">
                 <a:tc>
                   <a:txBody>
                     <a:bodyPr/>
                     <a:lstStyle/>
                     <a:p>
                       <a:r>
-                        <a:rPr lang="nl-NL" sz="1050" dirty="0"/>
+                        <a:rPr lang="nl-NL" sz="1000" dirty="0"/>
                         <a:t>e0f01e9a67c04b54a9fc40442909a126</a:t>
                       </a:r>
                     </a:p>
@@ -7169,7 +7500,7 @@
                     <a:bodyPr/>
                     <a:lstStyle/>
                     <a:p>
-                      <a:endParaRPr lang="nl-NL" sz="1400" dirty="0"/>
+                      <a:endParaRPr lang="nl-NL" sz="1200" dirty="0"/>
                     </a:p>
                   </a:txBody>
                   <a:tcPr/>
@@ -7180,14 +7511,14 @@
                   </a:ext>
                 </a:extLst>
               </a:tr>
-              <a:tr h="304800">
+              <a:tr h="284922">
                 <a:tc>
                   <a:txBody>
                     <a:bodyPr/>
                     <a:lstStyle/>
                     <a:p>
                       <a:r>
-                        <a:rPr lang="nl-NL" sz="1050" dirty="0"/>
+                        <a:rPr lang="nl-NL" sz="1000" dirty="0"/>
                         <a:t>e2178794fa8b43b2a14c0709b4aa4b46</a:t>
                       </a:r>
                     </a:p>
@@ -7199,7 +7530,7 @@
                     <a:bodyPr/>
                     <a:lstStyle/>
                     <a:p>
-                      <a:endParaRPr lang="nl-NL" sz="1400" dirty="0"/>
+                      <a:endParaRPr lang="nl-NL" sz="1200" dirty="0"/>
                     </a:p>
                   </a:txBody>
                   <a:tcPr/>
@@ -7210,14 +7541,14 @@
                   </a:ext>
                 </a:extLst>
               </a:tr>
-              <a:tr h="304800">
+              <a:tr h="284922">
                 <a:tc>
                   <a:txBody>
                     <a:bodyPr/>
                     <a:lstStyle/>
                     <a:p>
                       <a:r>
-                        <a:rPr lang="nl-NL" sz="1050" dirty="0"/>
+                        <a:rPr lang="nl-NL" sz="1000" dirty="0"/>
                         <a:t>f3fc5d2e0f4e47018f8c79c3be85f9aa</a:t>
                       </a:r>
                     </a:p>
@@ -7229,7 +7560,7 @@
                     <a:bodyPr/>
                     <a:lstStyle/>
                     <a:p>
-                      <a:endParaRPr lang="nl-NL" sz="1400" dirty="0"/>
+                      <a:endParaRPr lang="nl-NL" sz="1200" dirty="0"/>
                     </a:p>
                   </a:txBody>
                   <a:tcPr/>
@@ -7240,14 +7571,14 @@
                   </a:ext>
                 </a:extLst>
               </a:tr>
-              <a:tr h="304800">
+              <a:tr h="284922">
                 <a:tc>
                   <a:txBody>
                     <a:bodyPr/>
                     <a:lstStyle/>
                     <a:p>
                       <a:r>
-                        <a:rPr lang="nl-NL" sz="1050" dirty="0"/>
+                        <a:rPr lang="nl-NL" sz="1000" dirty="0"/>
                         <a:t>a559f9023a024249a498249407013a32</a:t>
                       </a:r>
                     </a:p>
@@ -7259,7 +7590,7 @@
                     <a:bodyPr/>
                     <a:lstStyle/>
                     <a:p>
-                      <a:endParaRPr lang="nl-NL" sz="1400" dirty="0"/>
+                      <a:endParaRPr lang="nl-NL" sz="1200" dirty="0"/>
                     </a:p>
                   </a:txBody>
                   <a:tcPr/>
@@ -7270,14 +7601,14 @@
                   </a:ext>
                 </a:extLst>
               </a:tr>
-              <a:tr h="304800">
+              <a:tr h="284922">
                 <a:tc>
                   <a:txBody>
                     <a:bodyPr/>
                     <a:lstStyle/>
                     <a:p>
                       <a:r>
-                        <a:rPr lang="nl-NL" sz="1050" dirty="0"/>
+                        <a:rPr lang="nl-NL" sz="1000" dirty="0"/>
                         <a:t>84ad0adfb49f4185a77a81697a3ea12d</a:t>
                       </a:r>
                     </a:p>
@@ -7289,7 +7620,7 @@
                     <a:bodyPr/>
                     <a:lstStyle/>
                     <a:p>
-                      <a:endParaRPr lang="nl-NL" sz="1400" dirty="0"/>
+                      <a:endParaRPr lang="nl-NL" sz="1200" dirty="0"/>
                     </a:p>
                   </a:txBody>
                   <a:tcPr/>
@@ -7300,14 +7631,14 @@
                   </a:ext>
                 </a:extLst>
               </a:tr>
-              <a:tr h="304800">
+              <a:tr h="284922">
                 <a:tc>
                   <a:txBody>
                     <a:bodyPr/>
                     <a:lstStyle/>
                     <a:p>
                       <a:r>
-                        <a:rPr lang="nl-NL" sz="1050" dirty="0"/>
+                        <a:rPr lang="nl-NL" sz="1000" dirty="0"/>
                         <a:t>90a8367b0d164a57806b171ed05f2da8</a:t>
                       </a:r>
                     </a:p>
@@ -7319,7 +7650,7 @@
                     <a:bodyPr/>
                     <a:lstStyle/>
                     <a:p>
-                      <a:endParaRPr lang="nl-NL" sz="1400" dirty="0"/>
+                      <a:endParaRPr lang="nl-NL" sz="1200" dirty="0"/>
                     </a:p>
                   </a:txBody>
                   <a:tcPr/>
@@ -7330,14 +7661,14 @@
                   </a:ext>
                 </a:extLst>
               </a:tr>
-              <a:tr h="304800">
+              <a:tr h="284922">
                 <a:tc>
                   <a:txBody>
                     <a:bodyPr/>
                     <a:lstStyle/>
                     <a:p>
                       <a:r>
-                        <a:rPr lang="nl-NL" sz="1050" dirty="0"/>
+                        <a:rPr lang="nl-NL" sz="1000" dirty="0"/>
                         <a:t>23963e325e4147d2bd8cfce8323d2e88</a:t>
                       </a:r>
                     </a:p>
@@ -7349,7 +7680,7 @@
                     <a:bodyPr/>
                     <a:lstStyle/>
                     <a:p>
-                      <a:endParaRPr lang="nl-NL" sz="1400" dirty="0"/>
+                      <a:endParaRPr lang="nl-NL" sz="1200" dirty="0"/>
                     </a:p>
                   </a:txBody>
                   <a:tcPr/>
@@ -7899,7 +8230,7 @@
           <p:cNvPr id="2" name="Title 1">
             <a:extLst>
               <a:ext uri="{FF2B5EF4-FFF2-40B4-BE49-F238E27FC236}">
-                <a16:creationId xmlns:a16="http://schemas.microsoft.com/office/drawing/2014/main" id="{3023818D-803E-602B-1B05-462B3403C3CA}"/>
+                <a16:creationId xmlns:a16="http://schemas.microsoft.com/office/drawing/2014/main" id="{0B0BC23D-A5F4-9C61-D7D1-EE52C3F95D5C}"/>
               </a:ext>
             </a:extLst>
           </p:cNvPr>
@@ -7917,108 +8248,189 @@
           <a:p>
             <a:r>
               <a:rPr lang="nl-NL" dirty="0" err="1"/>
-              <a:t>Weird</a:t>
-            </a:r>
-            <a:r>
-              <a:rPr lang="nl-NL" dirty="0"/>
-              <a:t> </a:t>
-            </a:r>
-            <a:r>
-              <a:rPr lang="nl-NL" dirty="0" err="1"/>
-              <a:t>descrapency</a:t>
-            </a:r>
-            <a:r>
-              <a:rPr lang="nl-NL" dirty="0"/>
-              <a:t> </a:t>
-            </a:r>
-            <a:r>
-              <a:rPr lang="nl-NL" dirty="0" err="1"/>
-              <a:t>between</a:t>
-            </a:r>
-            <a:r>
-              <a:rPr lang="nl-NL" dirty="0"/>
-              <a:t> shunt </a:t>
-            </a:r>
-            <a:r>
-              <a:rPr lang="nl-NL" dirty="0" err="1"/>
-              <a:t>and</a:t>
-            </a:r>
-            <a:r>
-              <a:rPr lang="nl-NL" dirty="0"/>
-              <a:t> </a:t>
-            </a:r>
-            <a:r>
-              <a:rPr lang="nl-NL" dirty="0" err="1"/>
-              <a:t>multi</a:t>
-            </a:r>
-            <a:endParaRPr lang="nl-NL" dirty="0"/>
+              <a:t>Lists</a:t>
+            </a:r>
+            <a:r>
+              <a:rPr lang="nl-NL" dirty="0"/>
+              <a:t> of songs</a:t>
+            </a:r>
           </a:p>
         </p:txBody>
       </p:sp>
-      <p:pic>
-        <p:nvPicPr>
-          <p:cNvPr id="5" name="Picture 4">
+      <p:sp>
+        <p:nvSpPr>
+          <p:cNvPr id="3" name="Content Placeholder 2">
             <a:extLst>
               <a:ext uri="{FF2B5EF4-FFF2-40B4-BE49-F238E27FC236}">
-                <a16:creationId xmlns:a16="http://schemas.microsoft.com/office/drawing/2014/main" id="{4EFAD7D0-BE81-39F0-D76B-BC3BED74CE80}"/>
+                <a16:creationId xmlns:a16="http://schemas.microsoft.com/office/drawing/2014/main" id="{97F09E47-FD92-0DC7-CC19-FC42EC9CDCFC}"/>
               </a:ext>
             </a:extLst>
           </p:cNvPr>
-          <p:cNvPicPr>
-            <a:picLocks noChangeAspect="1"/>
-          </p:cNvPicPr>
-          <p:nvPr/>
-        </p:nvPicPr>
-        <p:blipFill>
-          <a:blip r:embed="rId3"/>
-          <a:stretch>
-            <a:fillRect/>
-          </a:stretch>
-        </p:blipFill>
-        <p:spPr>
-          <a:xfrm>
-            <a:off x="6181003" y="2134570"/>
-            <a:ext cx="5172797" cy="4429743"/>
-          </a:xfrm>
-          <a:prstGeom prst="rect">
-            <a:avLst/>
-          </a:prstGeom>
-        </p:spPr>
-      </p:pic>
-      <p:pic>
-        <p:nvPicPr>
-          <p:cNvPr id="7" name="Picture 6">
-            <a:extLst>
-              <a:ext uri="{FF2B5EF4-FFF2-40B4-BE49-F238E27FC236}">
-                <a16:creationId xmlns:a16="http://schemas.microsoft.com/office/drawing/2014/main" id="{37A73302-3774-5B0C-DDE3-83855B148861}"/>
-              </a:ext>
-            </a:extLst>
-          </p:cNvPr>
-          <p:cNvPicPr>
-            <a:picLocks noChangeAspect="1"/>
-          </p:cNvPicPr>
-          <p:nvPr/>
-        </p:nvPicPr>
-        <p:blipFill>
-          <a:blip r:embed="rId4"/>
-          <a:stretch>
-            <a:fillRect/>
-          </a:stretch>
-        </p:blipFill>
-        <p:spPr>
-          <a:xfrm>
-            <a:off x="838200" y="2401307"/>
-            <a:ext cx="5115639" cy="4163006"/>
-          </a:xfrm>
-          <a:prstGeom prst="rect">
-            <a:avLst/>
-          </a:prstGeom>
-        </p:spPr>
-      </p:pic>
+          <p:cNvSpPr>
+            <a:spLocks noGrp="1"/>
+          </p:cNvSpPr>
+          <p:nvPr>
+            <p:ph idx="1"/>
+          </p:nvPr>
+        </p:nvSpPr>
+        <p:spPr/>
+        <p:txBody>
+          <a:bodyPr/>
+          <a:lstStyle/>
+          <a:p>
+            <a:r>
+              <a:rPr lang="nl-NL" dirty="0"/>
+              <a:t>Dictionary, </a:t>
+            </a:r>
+            <a:r>
+              <a:rPr lang="nl-NL" dirty="0" err="1"/>
+              <a:t>for</a:t>
+            </a:r>
+            <a:r>
+              <a:rPr lang="nl-NL" dirty="0"/>
+              <a:t> </a:t>
+            </a:r>
+            <a:r>
+              <a:rPr lang="nl-NL" dirty="0" err="1"/>
+              <a:t>library</a:t>
+            </a:r>
+            <a:r>
+              <a:rPr lang="nl-NL" dirty="0"/>
+              <a:t> </a:t>
+            </a:r>
+            <a:r>
+              <a:rPr lang="nl-NL" dirty="0" err="1"/>
+              <a:t>purposes</a:t>
+            </a:r>
+            <a:endParaRPr lang="nl-NL" dirty="0"/>
+          </a:p>
+          <a:p>
+            <a:r>
+              <a:rPr lang="nl-NL" dirty="0"/>
+              <a:t>Array of </a:t>
+            </a:r>
+            <a:r>
+              <a:rPr lang="nl-NL" dirty="0" err="1"/>
+              <a:t>ids</a:t>
+            </a:r>
+            <a:r>
+              <a:rPr lang="nl-NL" dirty="0"/>
+              <a:t>, </a:t>
+            </a:r>
+            <a:r>
+              <a:rPr lang="nl-NL" dirty="0" err="1"/>
+              <a:t>for</a:t>
+            </a:r>
+            <a:r>
+              <a:rPr lang="nl-NL" dirty="0"/>
+              <a:t> </a:t>
+            </a:r>
+            <a:r>
+              <a:rPr lang="nl-NL" dirty="0" err="1"/>
+              <a:t>playlists</a:t>
+            </a:r>
+            <a:r>
+              <a:rPr lang="nl-NL" dirty="0"/>
+              <a:t>, </a:t>
+            </a:r>
+            <a:r>
+              <a:rPr lang="nl-NL" dirty="0" err="1"/>
+              <a:t>ids</a:t>
+            </a:r>
+            <a:r>
+              <a:rPr lang="nl-NL" dirty="0"/>
+              <a:t> </a:t>
+            </a:r>
+            <a:r>
+              <a:rPr lang="nl-NL" dirty="0" err="1"/>
+              <a:t>need</a:t>
+            </a:r>
+            <a:r>
+              <a:rPr lang="nl-NL" dirty="0"/>
+              <a:t> </a:t>
+            </a:r>
+            <a:r>
+              <a:rPr lang="nl-NL" dirty="0" err="1"/>
+              <a:t>to</a:t>
+            </a:r>
+            <a:r>
+              <a:rPr lang="nl-NL" dirty="0"/>
+              <a:t> </a:t>
+            </a:r>
+            <a:r>
+              <a:rPr lang="nl-NL" dirty="0" err="1"/>
+              <a:t>be</a:t>
+            </a:r>
+            <a:r>
+              <a:rPr lang="nl-NL" dirty="0"/>
+              <a:t> </a:t>
+            </a:r>
+            <a:r>
+              <a:rPr lang="nl-NL" dirty="0" err="1"/>
+              <a:t>looked</a:t>
+            </a:r>
+            <a:r>
+              <a:rPr lang="nl-NL" dirty="0"/>
+              <a:t> up in track </a:t>
+            </a:r>
+            <a:r>
+              <a:rPr lang="nl-NL" dirty="0" err="1"/>
+              <a:t>dictionary</a:t>
+            </a:r>
+            <a:endParaRPr lang="nl-NL" dirty="0"/>
+          </a:p>
+          <a:p>
+            <a:r>
+              <a:rPr lang="nl-NL" dirty="0"/>
+              <a:t>Array of tracks, </a:t>
+            </a:r>
+            <a:r>
+              <a:rPr lang="nl-NL" dirty="0" err="1"/>
+              <a:t>for</a:t>
+            </a:r>
+            <a:r>
+              <a:rPr lang="nl-NL" dirty="0"/>
+              <a:t> </a:t>
+            </a:r>
+            <a:r>
+              <a:rPr lang="nl-NL" dirty="0" err="1"/>
+              <a:t>playing</a:t>
+            </a:r>
+            <a:r>
+              <a:rPr lang="nl-NL" dirty="0"/>
+              <a:t> </a:t>
+            </a:r>
+            <a:r>
+              <a:rPr lang="nl-NL" dirty="0" err="1"/>
+              <a:t>and</a:t>
+            </a:r>
+            <a:r>
+              <a:rPr lang="nl-NL" dirty="0"/>
+              <a:t> handling </a:t>
+            </a:r>
+            <a:r>
+              <a:rPr lang="nl-NL" dirty="0" err="1"/>
+              <a:t>by</a:t>
+            </a:r>
+            <a:r>
+              <a:rPr lang="nl-NL" dirty="0"/>
+              <a:t> </a:t>
+            </a:r>
+            <a:r>
+              <a:rPr lang="nl-NL" dirty="0" err="1"/>
+              <a:t>library</a:t>
+            </a:r>
+            <a:r>
+              <a:rPr lang="nl-NL" dirty="0"/>
+              <a:t> console</a:t>
+            </a:r>
+          </a:p>
+        </p:txBody>
+      </p:sp>
     </p:spTree>
     <p:extLst>
       <p:ext uri="{BB962C8B-B14F-4D97-AF65-F5344CB8AC3E}">
-        <p14:creationId xmlns:p14="http://schemas.microsoft.com/office/powerpoint/2010/main" val="2719609124"/>
+        <p14:creationId xmlns:p14="http://schemas.microsoft.com/office/powerpoint/2010/main" val="3374598119"/>
       </p:ext>
     </p:extLst>
   </p:cSld>
@@ -8050,7 +8462,7 @@
           <p:cNvPr id="2" name="Title 1">
             <a:extLst>
               <a:ext uri="{FF2B5EF4-FFF2-40B4-BE49-F238E27FC236}">
-                <a16:creationId xmlns:a16="http://schemas.microsoft.com/office/drawing/2014/main" id="{0B0BC23D-A5F4-9C61-D7D1-EE52C3F95D5C}"/>
+                <a16:creationId xmlns:a16="http://schemas.microsoft.com/office/drawing/2014/main" id="{DBF532D1-7B41-0108-913D-B6D7875DF57D}"/>
               </a:ext>
             </a:extLst>
           </p:cNvPr>
@@ -8068,11 +8480,11 @@
           <a:p>
             <a:r>
               <a:rPr lang="nl-NL" dirty="0" err="1"/>
-              <a:t>Lists</a:t>
-            </a:r>
-            <a:r>
-              <a:rPr lang="nl-NL" dirty="0"/>
-              <a:t> of songs</a:t>
+              <a:t>Duplicate</a:t>
+            </a:r>
+            <a:r>
+              <a:rPr lang="nl-NL" dirty="0"/>
+              <a:t> songs</a:t>
             </a:r>
           </a:p>
         </p:txBody>
@@ -8082,7 +8494,7 @@
           <p:cNvPr id="3" name="Content Placeholder 2">
             <a:extLst>
               <a:ext uri="{FF2B5EF4-FFF2-40B4-BE49-F238E27FC236}">
-                <a16:creationId xmlns:a16="http://schemas.microsoft.com/office/drawing/2014/main" id="{97F09E47-FD92-0DC7-CC19-FC42EC9CDCFC}"/>
+                <a16:creationId xmlns:a16="http://schemas.microsoft.com/office/drawing/2014/main" id="{62E02C2A-CA24-A116-2112-F0F856AC9222}"/>
               </a:ext>
             </a:extLst>
           </p:cNvPr>
@@ -8099,12 +8511,16 @@
           <a:lstStyle/>
           <a:p>
             <a:r>
-              <a:rPr lang="nl-NL" dirty="0"/>
-              <a:t>Dictionary, </a:t>
-            </a:r>
-            <a:r>
-              <a:rPr lang="nl-NL" dirty="0" err="1"/>
-              <a:t>for</a:t>
+              <a:rPr lang="nl-NL" dirty="0" err="1"/>
+              <a:t>If</a:t>
+            </a:r>
+            <a:r>
+              <a:rPr lang="nl-NL" dirty="0"/>
+              <a:t> I have a </a:t>
+            </a:r>
+            <a:r>
+              <a:rPr lang="nl-NL" dirty="0" err="1"/>
+              <a:t>traktor</a:t>
             </a:r>
             <a:r>
               <a:rPr lang="nl-NL" dirty="0"/>
@@ -8120,30 +8536,226 @@
             </a:r>
             <a:r>
               <a:rPr lang="nl-NL" dirty="0" err="1"/>
-              <a:t>purposes</a:t>
+              <a:t>which</a:t>
+            </a:r>
+            <a:r>
+              <a:rPr lang="nl-NL" dirty="0"/>
+              <a:t> </a:t>
+            </a:r>
+            <a:r>
+              <a:rPr lang="nl-NL" dirty="0" err="1"/>
+              <a:t>includes</a:t>
+            </a:r>
+            <a:r>
+              <a:rPr lang="nl-NL" dirty="0"/>
+              <a:t> </a:t>
+            </a:r>
+            <a:r>
+              <a:rPr lang="nl-NL" dirty="0" err="1"/>
+              <a:t>the</a:t>
+            </a:r>
+            <a:r>
+              <a:rPr lang="nl-NL" dirty="0"/>
+              <a:t> exact </a:t>
+            </a:r>
+            <a:r>
+              <a:rPr lang="nl-NL" dirty="0" err="1"/>
+              <a:t>same</a:t>
+            </a:r>
+            <a:r>
+              <a:rPr lang="nl-NL" dirty="0"/>
+              <a:t> song </a:t>
+            </a:r>
+            <a:r>
+              <a:rPr lang="nl-NL" dirty="0" err="1"/>
+              <a:t>twice</a:t>
             </a:r>
             <a:endParaRPr lang="nl-NL" dirty="0"/>
           </a:p>
           <a:p>
-            <a:r>
-              <a:rPr lang="nl-NL" dirty="0"/>
-              <a:t>Array of </a:t>
-            </a:r>
-            <a:r>
-              <a:rPr lang="nl-NL" dirty="0" err="1"/>
-              <a:t>ids</a:t>
-            </a:r>
-            <a:r>
-              <a:rPr lang="nl-NL" dirty="0"/>
-              <a:t>, </a:t>
-            </a:r>
-            <a:r>
-              <a:rPr lang="nl-NL" dirty="0" err="1"/>
-              <a:t>for</a:t>
-            </a:r>
-            <a:r>
-              <a:rPr lang="nl-NL" dirty="0"/>
-              <a:t> </a:t>
+            <a:pPr lvl="1"/>
+            <a:r>
+              <a:rPr lang="nl-NL" dirty="0"/>
+              <a:t>Both have </a:t>
+            </a:r>
+            <a:r>
+              <a:rPr lang="nl-NL" dirty="0" err="1"/>
+              <a:t>the</a:t>
+            </a:r>
+            <a:r>
+              <a:rPr lang="nl-NL" dirty="0"/>
+              <a:t> </a:t>
+            </a:r>
+            <a:r>
+              <a:rPr lang="nl-NL" dirty="0" err="1"/>
+              <a:t>same</a:t>
+            </a:r>
+            <a:r>
+              <a:rPr lang="nl-NL" dirty="0"/>
+              <a:t> audio </a:t>
+            </a:r>
+            <a:r>
+              <a:rPr lang="nl-NL" dirty="0" err="1"/>
+              <a:t>id</a:t>
+            </a:r>
+            <a:endParaRPr lang="nl-NL" dirty="0"/>
+          </a:p>
+          <a:p>
+            <a:pPr lvl="1"/>
+            <a:r>
+              <a:rPr lang="nl-NL" dirty="0"/>
+              <a:t>But different file </a:t>
+            </a:r>
+            <a:r>
+              <a:rPr lang="nl-NL" dirty="0" err="1"/>
+              <a:t>location</a:t>
+            </a:r>
+            <a:endParaRPr lang="nl-NL" dirty="0"/>
+          </a:p>
+          <a:p>
+            <a:pPr lvl="1"/>
+            <a:r>
+              <a:rPr lang="nl-NL" dirty="0" err="1"/>
+              <a:t>When</a:t>
+            </a:r>
+            <a:r>
+              <a:rPr lang="nl-NL" dirty="0"/>
+              <a:t> </a:t>
+            </a:r>
+            <a:r>
+              <a:rPr lang="nl-NL" dirty="0" err="1"/>
+              <a:t>loading</a:t>
+            </a:r>
+            <a:r>
+              <a:rPr lang="nl-NL" dirty="0"/>
+              <a:t> </a:t>
+            </a:r>
+            <a:r>
+              <a:rPr lang="nl-NL" dirty="0" err="1"/>
+              <a:t>the</a:t>
+            </a:r>
+            <a:r>
+              <a:rPr lang="nl-NL" dirty="0"/>
+              <a:t> </a:t>
+            </a:r>
+            <a:r>
+              <a:rPr lang="nl-NL" dirty="0" err="1"/>
+              <a:t>library</a:t>
+            </a:r>
+            <a:r>
+              <a:rPr lang="nl-NL" dirty="0"/>
+              <a:t> </a:t>
+            </a:r>
+            <a:r>
+              <a:rPr lang="nl-NL" dirty="0" err="1"/>
+              <a:t>there</a:t>
+            </a:r>
+            <a:r>
+              <a:rPr lang="nl-NL" dirty="0"/>
+              <a:t> </a:t>
+            </a:r>
+            <a:r>
+              <a:rPr lang="nl-NL" dirty="0" err="1"/>
+              <a:t>will</a:t>
+            </a:r>
+            <a:r>
+              <a:rPr lang="nl-NL" dirty="0"/>
+              <a:t> </a:t>
+            </a:r>
+            <a:r>
+              <a:rPr lang="nl-NL" dirty="0" err="1"/>
+              <a:t>be</a:t>
+            </a:r>
+            <a:r>
+              <a:rPr lang="nl-NL" dirty="0"/>
+              <a:t> made </a:t>
+            </a:r>
+            <a:r>
+              <a:rPr lang="nl-NL" dirty="0" err="1"/>
+              <a:t>one</a:t>
+            </a:r>
+            <a:r>
+              <a:rPr lang="nl-NL" dirty="0"/>
+              <a:t> entry, </a:t>
+            </a:r>
+            <a:r>
+              <a:rPr lang="nl-NL" dirty="0" err="1"/>
+              <a:t>and</a:t>
+            </a:r>
+            <a:r>
+              <a:rPr lang="nl-NL" dirty="0"/>
+              <a:t> </a:t>
+            </a:r>
+            <a:r>
+              <a:rPr lang="nl-NL" dirty="0" err="1"/>
+              <a:t>this</a:t>
+            </a:r>
+            <a:r>
+              <a:rPr lang="nl-NL" dirty="0"/>
+              <a:t> entry </a:t>
+            </a:r>
+            <a:r>
+              <a:rPr lang="nl-NL" dirty="0" err="1"/>
+              <a:t>will</a:t>
+            </a:r>
+            <a:r>
+              <a:rPr lang="nl-NL" dirty="0"/>
+              <a:t> </a:t>
+            </a:r>
+            <a:r>
+              <a:rPr lang="nl-NL" dirty="0" err="1"/>
+              <a:t>be</a:t>
+            </a:r>
+            <a:r>
+              <a:rPr lang="nl-NL" dirty="0"/>
+              <a:t> </a:t>
+            </a:r>
+            <a:r>
+              <a:rPr lang="nl-NL" dirty="0" err="1"/>
+              <a:t>overriden</a:t>
+            </a:r>
+            <a:r>
+              <a:rPr lang="nl-NL" dirty="0"/>
+              <a:t> </a:t>
+            </a:r>
+            <a:r>
+              <a:rPr lang="nl-NL" dirty="0" err="1"/>
+              <a:t>with</a:t>
+            </a:r>
+            <a:r>
+              <a:rPr lang="nl-NL" dirty="0"/>
+              <a:t> </a:t>
+            </a:r>
+            <a:r>
+              <a:rPr lang="nl-NL" dirty="0" err="1"/>
+              <a:t>the</a:t>
+            </a:r>
+            <a:r>
+              <a:rPr lang="nl-NL" dirty="0"/>
+              <a:t> </a:t>
+            </a:r>
+            <a:r>
+              <a:rPr lang="nl-NL" dirty="0" err="1"/>
+              <a:t>other</a:t>
+            </a:r>
+            <a:r>
+              <a:rPr lang="nl-NL" dirty="0"/>
+              <a:t> file </a:t>
+            </a:r>
+            <a:r>
+              <a:rPr lang="nl-NL" dirty="0" err="1"/>
+              <a:t>location</a:t>
+            </a:r>
+            <a:endParaRPr lang="nl-NL" dirty="0"/>
+          </a:p>
+          <a:p>
+            <a:r>
+              <a:rPr lang="nl-NL" dirty="0" err="1"/>
+              <a:t>Looking</a:t>
+            </a:r>
+            <a:r>
+              <a:rPr lang="nl-NL" dirty="0"/>
+              <a:t> up </a:t>
             </a:r>
             <a:r>
               <a:rPr lang="nl-NL" dirty="0" err="1"/>
@@ -8151,106 +8763,100 @@
             </a:r>
             <a:r>
               <a:rPr lang="nl-NL" dirty="0"/>
-              <a:t>, </a:t>
-            </a:r>
-            <a:r>
-              <a:rPr lang="nl-NL" dirty="0" err="1"/>
-              <a:t>ids</a:t>
-            </a:r>
-            <a:r>
-              <a:rPr lang="nl-NL" dirty="0"/>
-              <a:t> </a:t>
-            </a:r>
-            <a:r>
-              <a:rPr lang="nl-NL" dirty="0" err="1"/>
-              <a:t>need</a:t>
-            </a:r>
-            <a:r>
-              <a:rPr lang="nl-NL" dirty="0"/>
-              <a:t> </a:t>
-            </a:r>
-            <a:r>
-              <a:rPr lang="nl-NL" dirty="0" err="1"/>
-              <a:t>to</a:t>
-            </a:r>
-            <a:r>
-              <a:rPr lang="nl-NL" dirty="0"/>
-              <a:t> </a:t>
-            </a:r>
-            <a:r>
-              <a:rPr lang="nl-NL" dirty="0" err="1"/>
-              <a:t>be</a:t>
-            </a:r>
-            <a:r>
-              <a:rPr lang="nl-NL" dirty="0"/>
-              <a:t> </a:t>
-            </a:r>
-            <a:r>
-              <a:rPr lang="nl-NL" dirty="0" err="1"/>
-              <a:t>looked</a:t>
-            </a:r>
-            <a:r>
-              <a:rPr lang="nl-NL" dirty="0"/>
-              <a:t> up in track </a:t>
+              <a:t> </a:t>
+            </a:r>
+            <a:r>
+              <a:rPr lang="nl-NL" dirty="0" err="1"/>
+              <a:t>goes</a:t>
+            </a:r>
+            <a:r>
+              <a:rPr lang="nl-NL" dirty="0"/>
+              <a:t> </a:t>
+            </a:r>
+            <a:r>
+              <a:rPr lang="nl-NL" dirty="0" err="1"/>
+              <a:t>by</a:t>
+            </a:r>
+            <a:r>
+              <a:rPr lang="nl-NL" dirty="0"/>
+              <a:t> file </a:t>
+            </a:r>
+            <a:r>
+              <a:rPr lang="nl-NL" dirty="0" err="1"/>
+              <a:t>location</a:t>
+            </a:r>
+            <a:endParaRPr lang="nl-NL" dirty="0"/>
+          </a:p>
+          <a:p>
+            <a:pPr lvl="1"/>
+            <a:r>
+              <a:rPr lang="nl-NL" dirty="0" err="1"/>
+              <a:t>Better</a:t>
+            </a:r>
+            <a:r>
+              <a:rPr lang="nl-NL" dirty="0"/>
+              <a:t> store </a:t>
+            </a:r>
+            <a:r>
+              <a:rPr lang="nl-NL" dirty="0" err="1"/>
+              <a:t>them</a:t>
+            </a:r>
+            <a:r>
+              <a:rPr lang="nl-NL" dirty="0"/>
+              <a:t> </a:t>
+            </a:r>
+            <a:r>
+              <a:rPr lang="nl-NL" dirty="0" err="1"/>
+              <a:t>by</a:t>
+            </a:r>
+            <a:r>
+              <a:rPr lang="nl-NL" dirty="0"/>
+              <a:t> file </a:t>
+            </a:r>
+            <a:r>
+              <a:rPr lang="nl-NL" dirty="0" err="1"/>
+              <a:t>location</a:t>
+            </a:r>
+            <a:r>
+              <a:rPr lang="nl-NL" dirty="0"/>
+              <a:t> </a:t>
+            </a:r>
+            <a:r>
+              <a:rPr lang="nl-NL" dirty="0" err="1"/>
+              <a:t>instead</a:t>
+            </a:r>
+            <a:r>
+              <a:rPr lang="nl-NL" dirty="0"/>
+              <a:t> of audio </a:t>
+            </a:r>
+            <a:r>
+              <a:rPr lang="nl-NL" dirty="0" err="1"/>
+              <a:t>id</a:t>
+            </a:r>
+            <a:r>
+              <a:rPr lang="nl-NL" dirty="0"/>
+              <a:t> in </a:t>
+            </a:r>
+            <a:r>
+              <a:rPr lang="nl-NL" dirty="0" err="1"/>
+              <a:t>the</a:t>
+            </a:r>
+            <a:r>
+              <a:rPr lang="nl-NL" dirty="0"/>
+              <a:t> </a:t>
             </a:r>
             <a:r>
               <a:rPr lang="nl-NL" dirty="0" err="1"/>
               <a:t>dictionary</a:t>
             </a:r>
             <a:endParaRPr lang="nl-NL" dirty="0"/>
-          </a:p>
-          <a:p>
-            <a:r>
-              <a:rPr lang="nl-NL" dirty="0"/>
-              <a:t>Array of tracks, </a:t>
-            </a:r>
-            <a:r>
-              <a:rPr lang="nl-NL" dirty="0" err="1"/>
-              <a:t>for</a:t>
-            </a:r>
-            <a:r>
-              <a:rPr lang="nl-NL" dirty="0"/>
-              <a:t> </a:t>
-            </a:r>
-            <a:r>
-              <a:rPr lang="nl-NL" dirty="0" err="1"/>
-              <a:t>playing</a:t>
-            </a:r>
-            <a:r>
-              <a:rPr lang="nl-NL" dirty="0"/>
-              <a:t> </a:t>
-            </a:r>
-            <a:r>
-              <a:rPr lang="nl-NL" dirty="0" err="1"/>
-              <a:t>and</a:t>
-            </a:r>
-            <a:r>
-              <a:rPr lang="nl-NL" dirty="0"/>
-              <a:t> handling </a:t>
-            </a:r>
-            <a:r>
-              <a:rPr lang="nl-NL" dirty="0" err="1"/>
-              <a:t>by</a:t>
-            </a:r>
-            <a:r>
-              <a:rPr lang="nl-NL" dirty="0"/>
-              <a:t> </a:t>
-            </a:r>
-            <a:r>
-              <a:rPr lang="nl-NL" dirty="0" err="1"/>
-              <a:t>library</a:t>
-            </a:r>
-            <a:r>
-              <a:rPr lang="nl-NL" dirty="0"/>
-              <a:t> console</a:t>
-            </a:r>
           </a:p>
         </p:txBody>
       </p:sp>
     </p:spTree>
     <p:extLst>
       <p:ext uri="{BB962C8B-B14F-4D97-AF65-F5344CB8AC3E}">
-        <p14:creationId xmlns:p14="http://schemas.microsoft.com/office/powerpoint/2010/main" val="3374598119"/>
+        <p14:creationId xmlns:p14="http://schemas.microsoft.com/office/powerpoint/2010/main" val="1101915464"/>
       </p:ext>
     </p:extLst>
   </p:cSld>

--- a/Design Log/Music Library.pptx
+++ b/Design Log/Music Library.pptx
@@ -5,7 +5,7 @@
     <p:sldMasterId id="2147483648" r:id="rId1"/>
   </p:sldMasterIdLst>
   <p:notesMasterIdLst>
-    <p:notesMasterId r:id="rId15"/>
+    <p:notesMasterId r:id="rId16"/>
   </p:notesMasterIdLst>
   <p:sldIdLst>
     <p:sldId id="256" r:id="rId2"/>
@@ -21,6 +21,7 @@
     <p:sldId id="267" r:id="rId12"/>
     <p:sldId id="268" r:id="rId13"/>
     <p:sldId id="269" r:id="rId14"/>
+    <p:sldId id="270" r:id="rId15"/>
   </p:sldIdLst>
   <p:sldSz cx="12192000" cy="6858000"/>
   <p:notesSz cx="6858000" cy="9144000"/>
@@ -209,7 +210,7 @@
           <a:p>
             <a:fld id="{69EAFAAE-CE2E-4AA9-83BD-55884CEF3EFD}" type="datetimeFigureOut">
               <a:rPr lang="nl-NL" smtClean="0"/>
-              <a:t>29-5-2025</a:t>
+              <a:t>4-6-2025</a:t>
             </a:fld>
             <a:endParaRPr lang="nl-NL"/>
           </a:p>
@@ -626,7 +627,7 @@
           <a:p>
             <a:fld id="{0506D139-8255-4032-8342-CDBE6BDAFC36}" type="datetimeFigureOut">
               <a:rPr lang="nl-NL" smtClean="0"/>
-              <a:t>29-5-2025</a:t>
+              <a:t>4-6-2025</a:t>
             </a:fld>
             <a:endParaRPr lang="nl-NL"/>
           </a:p>
@@ -826,7 +827,7 @@
           <a:p>
             <a:fld id="{0506D139-8255-4032-8342-CDBE6BDAFC36}" type="datetimeFigureOut">
               <a:rPr lang="nl-NL" smtClean="0"/>
-              <a:t>29-5-2025</a:t>
+              <a:t>4-6-2025</a:t>
             </a:fld>
             <a:endParaRPr lang="nl-NL"/>
           </a:p>
@@ -1036,7 +1037,7 @@
           <a:p>
             <a:fld id="{0506D139-8255-4032-8342-CDBE6BDAFC36}" type="datetimeFigureOut">
               <a:rPr lang="nl-NL" smtClean="0"/>
-              <a:t>29-5-2025</a:t>
+              <a:t>4-6-2025</a:t>
             </a:fld>
             <a:endParaRPr lang="nl-NL"/>
           </a:p>
@@ -1236,7 +1237,7 @@
           <a:p>
             <a:fld id="{0506D139-8255-4032-8342-CDBE6BDAFC36}" type="datetimeFigureOut">
               <a:rPr lang="nl-NL" smtClean="0"/>
-              <a:t>29-5-2025</a:t>
+              <a:t>4-6-2025</a:t>
             </a:fld>
             <a:endParaRPr lang="nl-NL"/>
           </a:p>
@@ -1512,7 +1513,7 @@
           <a:p>
             <a:fld id="{0506D139-8255-4032-8342-CDBE6BDAFC36}" type="datetimeFigureOut">
               <a:rPr lang="nl-NL" smtClean="0"/>
-              <a:t>29-5-2025</a:t>
+              <a:t>4-6-2025</a:t>
             </a:fld>
             <a:endParaRPr lang="nl-NL"/>
           </a:p>
@@ -1780,7 +1781,7 @@
           <a:p>
             <a:fld id="{0506D139-8255-4032-8342-CDBE6BDAFC36}" type="datetimeFigureOut">
               <a:rPr lang="nl-NL" smtClean="0"/>
-              <a:t>29-5-2025</a:t>
+              <a:t>4-6-2025</a:t>
             </a:fld>
             <a:endParaRPr lang="nl-NL"/>
           </a:p>
@@ -2195,7 +2196,7 @@
           <a:p>
             <a:fld id="{0506D139-8255-4032-8342-CDBE6BDAFC36}" type="datetimeFigureOut">
               <a:rPr lang="nl-NL" smtClean="0"/>
-              <a:t>29-5-2025</a:t>
+              <a:t>4-6-2025</a:t>
             </a:fld>
             <a:endParaRPr lang="nl-NL"/>
           </a:p>
@@ -2337,7 +2338,7 @@
           <a:p>
             <a:fld id="{0506D139-8255-4032-8342-CDBE6BDAFC36}" type="datetimeFigureOut">
               <a:rPr lang="nl-NL" smtClean="0"/>
-              <a:t>29-5-2025</a:t>
+              <a:t>4-6-2025</a:t>
             </a:fld>
             <a:endParaRPr lang="nl-NL"/>
           </a:p>
@@ -2450,7 +2451,7 @@
           <a:p>
             <a:fld id="{0506D139-8255-4032-8342-CDBE6BDAFC36}" type="datetimeFigureOut">
               <a:rPr lang="nl-NL" smtClean="0"/>
-              <a:t>29-5-2025</a:t>
+              <a:t>4-6-2025</a:t>
             </a:fld>
             <a:endParaRPr lang="nl-NL"/>
           </a:p>
@@ -2763,7 +2764,7 @@
           <a:p>
             <a:fld id="{0506D139-8255-4032-8342-CDBE6BDAFC36}" type="datetimeFigureOut">
               <a:rPr lang="nl-NL" smtClean="0"/>
-              <a:t>29-5-2025</a:t>
+              <a:t>4-6-2025</a:t>
             </a:fld>
             <a:endParaRPr lang="nl-NL"/>
           </a:p>
@@ -3052,7 +3053,7 @@
           <a:p>
             <a:fld id="{0506D139-8255-4032-8342-CDBE6BDAFC36}" type="datetimeFigureOut">
               <a:rPr lang="nl-NL" smtClean="0"/>
-              <a:t>29-5-2025</a:t>
+              <a:t>4-6-2025</a:t>
             </a:fld>
             <a:endParaRPr lang="nl-NL"/>
           </a:p>
@@ -3295,7 +3296,7 @@
           <a:p>
             <a:fld id="{0506D139-8255-4032-8342-CDBE6BDAFC36}" type="datetimeFigureOut">
               <a:rPr lang="nl-NL" smtClean="0"/>
-              <a:t>29-5-2025</a:t>
+              <a:t>4-6-2025</a:t>
             </a:fld>
             <a:endParaRPr lang="nl-NL"/>
           </a:p>
@@ -4671,6 +4672,447 @@
     <p:extLst>
       <p:ext uri="{BB962C8B-B14F-4D97-AF65-F5344CB8AC3E}">
         <p14:creationId xmlns:p14="http://schemas.microsoft.com/office/powerpoint/2010/main" val="20252145"/>
+      </p:ext>
+    </p:extLst>
+  </p:cSld>
+  <p:clrMapOvr>
+    <a:masterClrMapping/>
+  </p:clrMapOvr>
+</p:sld>
+</file>
+
+<file path=ppt/slides/slide14.xml><?xml version="1.0" encoding="utf-8"?>
+<p:sld xmlns:a="http://schemas.openxmlformats.org/drawingml/2006/main" xmlns:r="http://schemas.openxmlformats.org/officeDocument/2006/relationships" xmlns:p="http://schemas.openxmlformats.org/presentationml/2006/main">
+  <p:cSld>
+    <p:spTree>
+      <p:nvGrpSpPr>
+        <p:cNvPr id="1" name=""/>
+        <p:cNvGrpSpPr/>
+        <p:nvPr/>
+      </p:nvGrpSpPr>
+      <p:grpSpPr>
+        <a:xfrm>
+          <a:off x="0" y="0"/>
+          <a:ext cx="0" cy="0"/>
+          <a:chOff x="0" y="0"/>
+          <a:chExt cx="0" cy="0"/>
+        </a:xfrm>
+      </p:grpSpPr>
+      <p:sp>
+        <p:nvSpPr>
+          <p:cNvPr id="2" name="Title 1">
+            <a:extLst>
+              <a:ext uri="{FF2B5EF4-FFF2-40B4-BE49-F238E27FC236}">
+                <a16:creationId xmlns:a16="http://schemas.microsoft.com/office/drawing/2014/main" id="{2DF63892-FA3D-8752-77E5-F33D42F5D674}"/>
+              </a:ext>
+            </a:extLst>
+          </p:cNvPr>
+          <p:cNvSpPr>
+            <a:spLocks noGrp="1"/>
+          </p:cNvSpPr>
+          <p:nvPr>
+            <p:ph type="title"/>
+          </p:nvPr>
+        </p:nvSpPr>
+        <p:spPr/>
+        <p:txBody>
+          <a:bodyPr/>
+          <a:lstStyle/>
+          <a:p>
+            <a:r>
+              <a:rPr lang="nl-NL" dirty="0"/>
+              <a:t>Meta data	</a:t>
+            </a:r>
+          </a:p>
+        </p:txBody>
+      </p:sp>
+      <p:sp>
+        <p:nvSpPr>
+          <p:cNvPr id="3" name="Content Placeholder 2">
+            <a:extLst>
+              <a:ext uri="{FF2B5EF4-FFF2-40B4-BE49-F238E27FC236}">
+                <a16:creationId xmlns:a16="http://schemas.microsoft.com/office/drawing/2014/main" id="{47F533B6-D336-6BDB-14B8-E3AE32FA5430}"/>
+              </a:ext>
+            </a:extLst>
+          </p:cNvPr>
+          <p:cNvSpPr>
+            <a:spLocks noGrp="1"/>
+          </p:cNvSpPr>
+          <p:nvPr>
+            <p:ph idx="1"/>
+          </p:nvPr>
+        </p:nvSpPr>
+        <p:spPr/>
+        <p:txBody>
+          <a:bodyPr/>
+          <a:lstStyle/>
+          <a:p>
+            <a:r>
+              <a:rPr lang="nl-NL" dirty="0" err="1"/>
+              <a:t>Traktor</a:t>
+            </a:r>
+            <a:r>
+              <a:rPr lang="nl-NL" dirty="0"/>
+              <a:t> stores </a:t>
+            </a:r>
+            <a:r>
+              <a:rPr lang="nl-NL" dirty="0" err="1"/>
+              <a:t>the</a:t>
+            </a:r>
+            <a:r>
+              <a:rPr lang="nl-NL" dirty="0"/>
+              <a:t> ID3 tag information in </a:t>
+            </a:r>
+            <a:r>
+              <a:rPr lang="nl-NL" dirty="0" err="1"/>
+              <a:t>its</a:t>
+            </a:r>
+            <a:r>
+              <a:rPr lang="nl-NL" dirty="0"/>
+              <a:t> </a:t>
+            </a:r>
+            <a:r>
+              <a:rPr lang="nl-NL" dirty="0" err="1"/>
+              <a:t>collection</a:t>
+            </a:r>
+            <a:r>
+              <a:rPr lang="nl-NL" dirty="0"/>
+              <a:t> </a:t>
+            </a:r>
+            <a:r>
+              <a:rPr lang="nl-NL"/>
+              <a:t>xml</a:t>
+            </a:r>
+          </a:p>
+          <a:p>
+            <a:r>
+              <a:rPr lang="nl-NL" dirty="0"/>
+              <a:t>Meta data </a:t>
+            </a:r>
+            <a:r>
+              <a:rPr lang="nl-NL" dirty="0" err="1"/>
+              <a:t>from</a:t>
+            </a:r>
+            <a:r>
+              <a:rPr lang="nl-NL" dirty="0"/>
+              <a:t> ID3 tags </a:t>
+            </a:r>
+            <a:r>
+              <a:rPr lang="nl-NL" dirty="0" err="1"/>
+              <a:t>cannot</a:t>
+            </a:r>
+            <a:r>
+              <a:rPr lang="nl-NL" dirty="0"/>
+              <a:t> </a:t>
+            </a:r>
+            <a:r>
+              <a:rPr lang="nl-NL" dirty="0" err="1"/>
+              <a:t>be</a:t>
+            </a:r>
+            <a:r>
+              <a:rPr lang="nl-NL" dirty="0"/>
+              <a:t> </a:t>
+            </a:r>
+            <a:r>
+              <a:rPr lang="nl-NL" dirty="0" err="1"/>
+              <a:t>read</a:t>
+            </a:r>
+            <a:r>
+              <a:rPr lang="nl-NL" dirty="0"/>
+              <a:t> </a:t>
+            </a:r>
+            <a:r>
+              <a:rPr lang="nl-NL" dirty="0" err="1"/>
+              <a:t>by</a:t>
+            </a:r>
+            <a:r>
+              <a:rPr lang="nl-NL" dirty="0"/>
+              <a:t> supercollider, </a:t>
+            </a:r>
+            <a:r>
+              <a:rPr lang="nl-NL" dirty="0" err="1"/>
+              <a:t>so</a:t>
+            </a:r>
+            <a:r>
+              <a:rPr lang="nl-NL" dirty="0"/>
+              <a:t> we </a:t>
+            </a:r>
+            <a:r>
+              <a:rPr lang="nl-NL" dirty="0" err="1"/>
+              <a:t>need</a:t>
+            </a:r>
+            <a:r>
+              <a:rPr lang="nl-NL" dirty="0"/>
+              <a:t> </a:t>
+            </a:r>
+            <a:r>
+              <a:rPr lang="nl-NL" dirty="0" err="1"/>
+              <a:t>to</a:t>
+            </a:r>
+            <a:r>
+              <a:rPr lang="nl-NL" dirty="0"/>
+              <a:t> </a:t>
+            </a:r>
+            <a:r>
+              <a:rPr lang="nl-NL" dirty="0" err="1"/>
+              <a:t>involve</a:t>
+            </a:r>
+            <a:r>
+              <a:rPr lang="nl-NL" dirty="0"/>
+              <a:t> a </a:t>
+            </a:r>
+            <a:r>
+              <a:rPr lang="nl-NL" dirty="0" err="1"/>
+              <a:t>third</a:t>
+            </a:r>
+            <a:r>
+              <a:rPr lang="nl-NL" dirty="0"/>
+              <a:t> party tool, </a:t>
+            </a:r>
+            <a:r>
+              <a:rPr lang="nl-NL" dirty="0" err="1"/>
+              <a:t>using</a:t>
+            </a:r>
+            <a:r>
+              <a:rPr lang="nl-NL" dirty="0"/>
+              <a:t> </a:t>
+            </a:r>
+            <a:r>
+              <a:rPr lang="nl-NL" dirty="0" err="1"/>
+              <a:t>UnixCmd</a:t>
+            </a:r>
+            <a:endParaRPr lang="nl-NL" dirty="0"/>
+          </a:p>
+          <a:p>
+            <a:pPr lvl="1"/>
+            <a:r>
+              <a:rPr lang="nl-NL" dirty="0"/>
+              <a:t>https://id3.org/id3v2.4.0-frames</a:t>
+            </a:r>
+          </a:p>
+          <a:p>
+            <a:pPr lvl="1"/>
+            <a:r>
+              <a:rPr lang="nl-NL" dirty="0" err="1"/>
+              <a:t>Ffprobe</a:t>
+            </a:r>
+            <a:r>
+              <a:rPr lang="nl-NL" dirty="0"/>
+              <a:t> </a:t>
+            </a:r>
+            <a:r>
+              <a:rPr lang="nl-NL" dirty="0" err="1"/>
+              <a:t>works</a:t>
+            </a:r>
+            <a:r>
+              <a:rPr lang="nl-NL" dirty="0"/>
+              <a:t> (</a:t>
+            </a:r>
+            <a:r>
+              <a:rPr lang="nl-NL" dirty="0" err="1"/>
+              <a:t>see</a:t>
+            </a:r>
+            <a:r>
+              <a:rPr lang="nl-NL" dirty="0"/>
+              <a:t> </a:t>
+            </a:r>
+            <a:r>
+              <a:rPr lang="nl-NL" dirty="0" err="1"/>
+              <a:t>TrackDiscription</a:t>
+            </a:r>
+            <a:r>
+              <a:rPr lang="nl-NL" dirty="0"/>
+              <a:t>. </a:t>
+            </a:r>
+            <a:r>
+              <a:rPr lang="nl-NL" dirty="0" err="1"/>
+              <a:t>energyFromMetaData</a:t>
+            </a:r>
+            <a:r>
+              <a:rPr lang="nl-NL" dirty="0"/>
+              <a:t>)</a:t>
+            </a:r>
+          </a:p>
+          <a:p>
+            <a:pPr lvl="2"/>
+            <a:r>
+              <a:rPr lang="nl-NL" dirty="0"/>
+              <a:t>It is slow </a:t>
+            </a:r>
+            <a:r>
+              <a:rPr lang="nl-NL" dirty="0" err="1"/>
+              <a:t>because</a:t>
+            </a:r>
+            <a:r>
+              <a:rPr lang="nl-NL" dirty="0"/>
+              <a:t> </a:t>
+            </a:r>
+            <a:r>
+              <a:rPr lang="nl-NL" dirty="0" err="1"/>
+              <a:t>it</a:t>
+            </a:r>
+            <a:r>
+              <a:rPr lang="nl-NL" dirty="0"/>
+              <a:t> </a:t>
+            </a:r>
+            <a:r>
+              <a:rPr lang="nl-NL" dirty="0" err="1"/>
+              <a:t>needs</a:t>
+            </a:r>
+            <a:r>
+              <a:rPr lang="nl-NL" dirty="0"/>
+              <a:t> </a:t>
+            </a:r>
+            <a:r>
+              <a:rPr lang="nl-NL" dirty="0" err="1"/>
+              <a:t>to</a:t>
+            </a:r>
+            <a:r>
+              <a:rPr lang="nl-NL" dirty="0"/>
+              <a:t> </a:t>
+            </a:r>
+            <a:r>
+              <a:rPr lang="nl-NL" dirty="0" err="1"/>
+              <a:t>fully</a:t>
+            </a:r>
+            <a:r>
+              <a:rPr lang="nl-NL" dirty="0"/>
+              <a:t> load </a:t>
+            </a:r>
+            <a:r>
+              <a:rPr lang="nl-NL" dirty="0" err="1"/>
+              <a:t>each</a:t>
+            </a:r>
+            <a:r>
+              <a:rPr lang="nl-NL" dirty="0"/>
+              <a:t> track</a:t>
+            </a:r>
+          </a:p>
+          <a:p>
+            <a:pPr lvl="1"/>
+            <a:r>
+              <a:rPr lang="nl-NL" dirty="0"/>
+              <a:t>We </a:t>
+            </a:r>
+            <a:r>
+              <a:rPr lang="nl-NL" dirty="0" err="1"/>
+              <a:t>can</a:t>
+            </a:r>
+            <a:r>
+              <a:rPr lang="nl-NL" dirty="0"/>
+              <a:t> </a:t>
+            </a:r>
+            <a:r>
+              <a:rPr lang="nl-NL" dirty="0" err="1"/>
+              <a:t>use</a:t>
+            </a:r>
+            <a:r>
+              <a:rPr lang="nl-NL" dirty="0"/>
+              <a:t> a python tool </a:t>
+            </a:r>
+            <a:r>
+              <a:rPr lang="nl-NL" dirty="0" err="1"/>
+              <a:t>such</a:t>
+            </a:r>
+            <a:r>
+              <a:rPr lang="nl-NL" dirty="0"/>
+              <a:t> as https://mutagen.readthedocs.io/en/latest/user/id3.html , we </a:t>
+            </a:r>
+            <a:r>
+              <a:rPr lang="nl-NL" dirty="0" err="1"/>
+              <a:t>should</a:t>
+            </a:r>
+            <a:r>
+              <a:rPr lang="nl-NL" dirty="0"/>
+              <a:t> make a python script </a:t>
+            </a:r>
+            <a:r>
+              <a:rPr lang="nl-NL" dirty="0" err="1"/>
+              <a:t>which</a:t>
+            </a:r>
+            <a:r>
+              <a:rPr lang="nl-NL" dirty="0"/>
+              <a:t> </a:t>
+            </a:r>
+            <a:r>
+              <a:rPr lang="nl-NL" dirty="0" err="1"/>
+              <a:t>notes</a:t>
+            </a:r>
+            <a:r>
+              <a:rPr lang="nl-NL" dirty="0"/>
+              <a:t> </a:t>
+            </a:r>
+            <a:r>
+              <a:rPr lang="nl-NL" dirty="0" err="1"/>
+              <a:t>the</a:t>
+            </a:r>
+            <a:r>
+              <a:rPr lang="nl-NL" dirty="0"/>
+              <a:t> </a:t>
+            </a:r>
+            <a:r>
+              <a:rPr lang="nl-NL" dirty="0" err="1"/>
+              <a:t>desired</a:t>
+            </a:r>
+            <a:r>
+              <a:rPr lang="nl-NL" dirty="0"/>
+              <a:t> information in a YAML file </a:t>
+            </a:r>
+            <a:r>
+              <a:rPr lang="nl-NL" dirty="0" err="1"/>
+              <a:t>for</a:t>
+            </a:r>
+            <a:r>
+              <a:rPr lang="nl-NL" dirty="0"/>
+              <a:t> </a:t>
+            </a:r>
+            <a:r>
+              <a:rPr lang="nl-NL" dirty="0" err="1"/>
+              <a:t>each</a:t>
+            </a:r>
+            <a:r>
+              <a:rPr lang="nl-NL" dirty="0"/>
+              <a:t> track, </a:t>
+            </a:r>
+            <a:r>
+              <a:rPr lang="nl-NL" dirty="0" err="1"/>
+              <a:t>then</a:t>
+            </a:r>
+            <a:r>
+              <a:rPr lang="nl-NL" dirty="0"/>
+              <a:t> supercollider </a:t>
+            </a:r>
+            <a:r>
+              <a:rPr lang="nl-NL" dirty="0" err="1"/>
+              <a:t>can</a:t>
+            </a:r>
+            <a:r>
+              <a:rPr lang="nl-NL" dirty="0"/>
+              <a:t> </a:t>
+            </a:r>
+            <a:r>
+              <a:rPr lang="nl-NL" dirty="0" err="1"/>
+              <a:t>read</a:t>
+            </a:r>
+            <a:r>
+              <a:rPr lang="nl-NL" dirty="0"/>
+              <a:t> </a:t>
+            </a:r>
+            <a:r>
+              <a:rPr lang="nl-NL" dirty="0" err="1"/>
+              <a:t>this</a:t>
+            </a:r>
+            <a:r>
+              <a:rPr lang="nl-NL" dirty="0"/>
+              <a:t> YAML file</a:t>
+            </a:r>
+          </a:p>
+        </p:txBody>
+      </p:sp>
+    </p:spTree>
+    <p:extLst>
+      <p:ext uri="{BB962C8B-B14F-4D97-AF65-F5344CB8AC3E}">
+        <p14:creationId xmlns:p14="http://schemas.microsoft.com/office/powerpoint/2010/main" val="188665701"/>
       </p:ext>
     </p:extLst>
   </p:cSld>

--- a/Design Log/Music Library.pptx
+++ b/Design Log/Music Library.pptx
@@ -210,7 +210,7 @@
           <a:p>
             <a:fld id="{69EAFAAE-CE2E-4AA9-83BD-55884CEF3EFD}" type="datetimeFigureOut">
               <a:rPr lang="nl-NL" smtClean="0"/>
-              <a:t>4-6-2025</a:t>
+              <a:t>12-6-2025</a:t>
             </a:fld>
             <a:endParaRPr lang="nl-NL"/>
           </a:p>
@@ -627,7 +627,7 @@
           <a:p>
             <a:fld id="{0506D139-8255-4032-8342-CDBE6BDAFC36}" type="datetimeFigureOut">
               <a:rPr lang="nl-NL" smtClean="0"/>
-              <a:t>4-6-2025</a:t>
+              <a:t>12-6-2025</a:t>
             </a:fld>
             <a:endParaRPr lang="nl-NL"/>
           </a:p>
@@ -827,7 +827,7 @@
           <a:p>
             <a:fld id="{0506D139-8255-4032-8342-CDBE6BDAFC36}" type="datetimeFigureOut">
               <a:rPr lang="nl-NL" smtClean="0"/>
-              <a:t>4-6-2025</a:t>
+              <a:t>12-6-2025</a:t>
             </a:fld>
             <a:endParaRPr lang="nl-NL"/>
           </a:p>
@@ -1037,7 +1037,7 @@
           <a:p>
             <a:fld id="{0506D139-8255-4032-8342-CDBE6BDAFC36}" type="datetimeFigureOut">
               <a:rPr lang="nl-NL" smtClean="0"/>
-              <a:t>4-6-2025</a:t>
+              <a:t>12-6-2025</a:t>
             </a:fld>
             <a:endParaRPr lang="nl-NL"/>
           </a:p>
@@ -1237,7 +1237,7 @@
           <a:p>
             <a:fld id="{0506D139-8255-4032-8342-CDBE6BDAFC36}" type="datetimeFigureOut">
               <a:rPr lang="nl-NL" smtClean="0"/>
-              <a:t>4-6-2025</a:t>
+              <a:t>12-6-2025</a:t>
             </a:fld>
             <a:endParaRPr lang="nl-NL"/>
           </a:p>
@@ -1513,7 +1513,7 @@
           <a:p>
             <a:fld id="{0506D139-8255-4032-8342-CDBE6BDAFC36}" type="datetimeFigureOut">
               <a:rPr lang="nl-NL" smtClean="0"/>
-              <a:t>4-6-2025</a:t>
+              <a:t>12-6-2025</a:t>
             </a:fld>
             <a:endParaRPr lang="nl-NL"/>
           </a:p>
@@ -1781,7 +1781,7 @@
           <a:p>
             <a:fld id="{0506D139-8255-4032-8342-CDBE6BDAFC36}" type="datetimeFigureOut">
               <a:rPr lang="nl-NL" smtClean="0"/>
-              <a:t>4-6-2025</a:t>
+              <a:t>12-6-2025</a:t>
             </a:fld>
             <a:endParaRPr lang="nl-NL"/>
           </a:p>
@@ -2196,7 +2196,7 @@
           <a:p>
             <a:fld id="{0506D139-8255-4032-8342-CDBE6BDAFC36}" type="datetimeFigureOut">
               <a:rPr lang="nl-NL" smtClean="0"/>
-              <a:t>4-6-2025</a:t>
+              <a:t>12-6-2025</a:t>
             </a:fld>
             <a:endParaRPr lang="nl-NL"/>
           </a:p>
@@ -2338,7 +2338,7 @@
           <a:p>
             <a:fld id="{0506D139-8255-4032-8342-CDBE6BDAFC36}" type="datetimeFigureOut">
               <a:rPr lang="nl-NL" smtClean="0"/>
-              <a:t>4-6-2025</a:t>
+              <a:t>12-6-2025</a:t>
             </a:fld>
             <a:endParaRPr lang="nl-NL"/>
           </a:p>
@@ -2451,7 +2451,7 @@
           <a:p>
             <a:fld id="{0506D139-8255-4032-8342-CDBE6BDAFC36}" type="datetimeFigureOut">
               <a:rPr lang="nl-NL" smtClean="0"/>
-              <a:t>4-6-2025</a:t>
+              <a:t>12-6-2025</a:t>
             </a:fld>
             <a:endParaRPr lang="nl-NL"/>
           </a:p>
@@ -2764,7 +2764,7 @@
           <a:p>
             <a:fld id="{0506D139-8255-4032-8342-CDBE6BDAFC36}" type="datetimeFigureOut">
               <a:rPr lang="nl-NL" smtClean="0"/>
-              <a:t>4-6-2025</a:t>
+              <a:t>12-6-2025</a:t>
             </a:fld>
             <a:endParaRPr lang="nl-NL"/>
           </a:p>
@@ -3053,7 +3053,7 @@
           <a:p>
             <a:fld id="{0506D139-8255-4032-8342-CDBE6BDAFC36}" type="datetimeFigureOut">
               <a:rPr lang="nl-NL" smtClean="0"/>
-              <a:t>4-6-2025</a:t>
+              <a:t>12-6-2025</a:t>
             </a:fld>
             <a:endParaRPr lang="nl-NL"/>
           </a:p>
@@ -3296,7 +3296,7 @@
           <a:p>
             <a:fld id="{0506D139-8255-4032-8342-CDBE6BDAFC36}" type="datetimeFigureOut">
               <a:rPr lang="nl-NL" smtClean="0"/>
-              <a:t>4-6-2025</a:t>
+              <a:t>12-6-2025</a:t>
             </a:fld>
             <a:endParaRPr lang="nl-NL"/>
           </a:p>
@@ -7374,7 +7374,7 @@
           <p:nvPr>
             <p:extLst>
               <p:ext uri="{D42A27DB-BD31-4B8C-83A1-F6EECF244321}">
-                <p14:modId xmlns:p14="http://schemas.microsoft.com/office/powerpoint/2010/main" val="2957816021"/>
+                <p14:modId xmlns:p14="http://schemas.microsoft.com/office/powerpoint/2010/main" val="965616998"/>
               </p:ext>
             </p:extLst>
           </p:nvPr>
@@ -7912,6 +7912,10 @@
                     <a:bodyPr/>
                     <a:lstStyle/>
                     <a:p>
+                      <a:r>
+                        <a:rPr lang="nl-NL" sz="1200" dirty="0" err="1"/>
+                        <a:t>History</a:t>
+                      </a:r>
                       <a:endParaRPr lang="nl-NL" sz="1200" dirty="0"/>
                     </a:p>
                   </a:txBody>

--- a/Design Log/Music Library.pptx
+++ b/Design Log/Music Library.pptx
@@ -5,7 +5,7 @@
     <p:sldMasterId id="2147483648" r:id="rId1"/>
   </p:sldMasterIdLst>
   <p:notesMasterIdLst>
-    <p:notesMasterId r:id="rId16"/>
+    <p:notesMasterId r:id="rId17"/>
   </p:notesMasterIdLst>
   <p:sldIdLst>
     <p:sldId id="256" r:id="rId2"/>
@@ -22,6 +22,7 @@
     <p:sldId id="268" r:id="rId13"/>
     <p:sldId id="269" r:id="rId14"/>
     <p:sldId id="270" r:id="rId15"/>
+    <p:sldId id="271" r:id="rId16"/>
   </p:sldIdLst>
   <p:sldSz cx="12192000" cy="6858000"/>
   <p:notesSz cx="6858000" cy="9144000"/>
@@ -210,7 +211,7 @@
           <a:p>
             <a:fld id="{69EAFAAE-CE2E-4AA9-83BD-55884CEF3EFD}" type="datetimeFigureOut">
               <a:rPr lang="nl-NL" smtClean="0"/>
-              <a:t>12-6-2025</a:t>
+              <a:t>24-6-2025</a:t>
             </a:fld>
             <a:endParaRPr lang="nl-NL"/>
           </a:p>
@@ -627,7 +628,7 @@
           <a:p>
             <a:fld id="{0506D139-8255-4032-8342-CDBE6BDAFC36}" type="datetimeFigureOut">
               <a:rPr lang="nl-NL" smtClean="0"/>
-              <a:t>12-6-2025</a:t>
+              <a:t>24-6-2025</a:t>
             </a:fld>
             <a:endParaRPr lang="nl-NL"/>
           </a:p>
@@ -827,7 +828,7 @@
           <a:p>
             <a:fld id="{0506D139-8255-4032-8342-CDBE6BDAFC36}" type="datetimeFigureOut">
               <a:rPr lang="nl-NL" smtClean="0"/>
-              <a:t>12-6-2025</a:t>
+              <a:t>24-6-2025</a:t>
             </a:fld>
             <a:endParaRPr lang="nl-NL"/>
           </a:p>
@@ -1037,7 +1038,7 @@
           <a:p>
             <a:fld id="{0506D139-8255-4032-8342-CDBE6BDAFC36}" type="datetimeFigureOut">
               <a:rPr lang="nl-NL" smtClean="0"/>
-              <a:t>12-6-2025</a:t>
+              <a:t>24-6-2025</a:t>
             </a:fld>
             <a:endParaRPr lang="nl-NL"/>
           </a:p>
@@ -1237,7 +1238,7 @@
           <a:p>
             <a:fld id="{0506D139-8255-4032-8342-CDBE6BDAFC36}" type="datetimeFigureOut">
               <a:rPr lang="nl-NL" smtClean="0"/>
-              <a:t>12-6-2025</a:t>
+              <a:t>24-6-2025</a:t>
             </a:fld>
             <a:endParaRPr lang="nl-NL"/>
           </a:p>
@@ -1513,7 +1514,7 @@
           <a:p>
             <a:fld id="{0506D139-8255-4032-8342-CDBE6BDAFC36}" type="datetimeFigureOut">
               <a:rPr lang="nl-NL" smtClean="0"/>
-              <a:t>12-6-2025</a:t>
+              <a:t>24-6-2025</a:t>
             </a:fld>
             <a:endParaRPr lang="nl-NL"/>
           </a:p>
@@ -1781,7 +1782,7 @@
           <a:p>
             <a:fld id="{0506D139-8255-4032-8342-CDBE6BDAFC36}" type="datetimeFigureOut">
               <a:rPr lang="nl-NL" smtClean="0"/>
-              <a:t>12-6-2025</a:t>
+              <a:t>24-6-2025</a:t>
             </a:fld>
             <a:endParaRPr lang="nl-NL"/>
           </a:p>
@@ -2196,7 +2197,7 @@
           <a:p>
             <a:fld id="{0506D139-8255-4032-8342-CDBE6BDAFC36}" type="datetimeFigureOut">
               <a:rPr lang="nl-NL" smtClean="0"/>
-              <a:t>12-6-2025</a:t>
+              <a:t>24-6-2025</a:t>
             </a:fld>
             <a:endParaRPr lang="nl-NL"/>
           </a:p>
@@ -2338,7 +2339,7 @@
           <a:p>
             <a:fld id="{0506D139-8255-4032-8342-CDBE6BDAFC36}" type="datetimeFigureOut">
               <a:rPr lang="nl-NL" smtClean="0"/>
-              <a:t>12-6-2025</a:t>
+              <a:t>24-6-2025</a:t>
             </a:fld>
             <a:endParaRPr lang="nl-NL"/>
           </a:p>
@@ -2451,7 +2452,7 @@
           <a:p>
             <a:fld id="{0506D139-8255-4032-8342-CDBE6BDAFC36}" type="datetimeFigureOut">
               <a:rPr lang="nl-NL" smtClean="0"/>
-              <a:t>12-6-2025</a:t>
+              <a:t>24-6-2025</a:t>
             </a:fld>
             <a:endParaRPr lang="nl-NL"/>
           </a:p>
@@ -2764,7 +2765,7 @@
           <a:p>
             <a:fld id="{0506D139-8255-4032-8342-CDBE6BDAFC36}" type="datetimeFigureOut">
               <a:rPr lang="nl-NL" smtClean="0"/>
-              <a:t>12-6-2025</a:t>
+              <a:t>24-6-2025</a:t>
             </a:fld>
             <a:endParaRPr lang="nl-NL"/>
           </a:p>
@@ -3053,7 +3054,7 @@
           <a:p>
             <a:fld id="{0506D139-8255-4032-8342-CDBE6BDAFC36}" type="datetimeFigureOut">
               <a:rPr lang="nl-NL" smtClean="0"/>
-              <a:t>12-6-2025</a:t>
+              <a:t>24-6-2025</a:t>
             </a:fld>
             <a:endParaRPr lang="nl-NL"/>
           </a:p>
@@ -3296,7 +3297,7 @@
           <a:p>
             <a:fld id="{0506D139-8255-4032-8342-CDBE6BDAFC36}" type="datetimeFigureOut">
               <a:rPr lang="nl-NL" smtClean="0"/>
-              <a:t>12-6-2025</a:t>
+              <a:t>24-6-2025</a:t>
             </a:fld>
             <a:endParaRPr lang="nl-NL"/>
           </a:p>
@@ -5113,6 +5114,133 @@
     <p:extLst>
       <p:ext uri="{BB962C8B-B14F-4D97-AF65-F5344CB8AC3E}">
         <p14:creationId xmlns:p14="http://schemas.microsoft.com/office/powerpoint/2010/main" val="188665701"/>
+      </p:ext>
+    </p:extLst>
+  </p:cSld>
+  <p:clrMapOvr>
+    <a:masterClrMapping/>
+  </p:clrMapOvr>
+</p:sld>
+</file>
+
+<file path=ppt/slides/slide15.xml><?xml version="1.0" encoding="utf-8"?>
+<p:sld xmlns:a="http://schemas.openxmlformats.org/drawingml/2006/main" xmlns:r="http://schemas.openxmlformats.org/officeDocument/2006/relationships" xmlns:p="http://schemas.openxmlformats.org/presentationml/2006/main">
+  <p:cSld>
+    <p:spTree>
+      <p:nvGrpSpPr>
+        <p:cNvPr id="1" name=""/>
+        <p:cNvGrpSpPr/>
+        <p:nvPr/>
+      </p:nvGrpSpPr>
+      <p:grpSpPr>
+        <a:xfrm>
+          <a:off x="0" y="0"/>
+          <a:ext cx="0" cy="0"/>
+          <a:chOff x="0" y="0"/>
+          <a:chExt cx="0" cy="0"/>
+        </a:xfrm>
+      </p:grpSpPr>
+      <p:sp>
+        <p:nvSpPr>
+          <p:cNvPr id="2" name="Title 1">
+            <a:extLst>
+              <a:ext uri="{FF2B5EF4-FFF2-40B4-BE49-F238E27FC236}">
+                <a16:creationId xmlns:a16="http://schemas.microsoft.com/office/drawing/2014/main" id="{BB5A75F3-3684-F049-08DC-25BB2E46699C}"/>
+              </a:ext>
+            </a:extLst>
+          </p:cNvPr>
+          <p:cNvSpPr>
+            <a:spLocks noGrp="1"/>
+          </p:cNvSpPr>
+          <p:nvPr>
+            <p:ph type="title"/>
+          </p:nvPr>
+        </p:nvSpPr>
+        <p:spPr/>
+        <p:txBody>
+          <a:bodyPr/>
+          <a:lstStyle/>
+          <a:p>
+            <a:r>
+              <a:rPr lang="nl-NL" dirty="0"/>
+              <a:t>New Playlist, barcode </a:t>
+            </a:r>
+            <a:r>
+              <a:rPr lang="nl-NL" dirty="0" err="1"/>
+              <a:t>to</a:t>
+            </a:r>
+            <a:r>
+              <a:rPr lang="nl-NL" dirty="0"/>
+              <a:t> </a:t>
+            </a:r>
+            <a:r>
+              <a:rPr lang="nl-NL" dirty="0" err="1"/>
+              <a:t>be</a:t>
+            </a:r>
+            <a:r>
+              <a:rPr lang="nl-NL" dirty="0"/>
+              <a:t> </a:t>
+            </a:r>
+            <a:r>
+              <a:rPr lang="nl-NL" dirty="0" err="1"/>
+              <a:t>generated</a:t>
+            </a:r>
+            <a:endParaRPr lang="nl-NL" dirty="0"/>
+          </a:p>
+        </p:txBody>
+      </p:sp>
+      <p:sp>
+        <p:nvSpPr>
+          <p:cNvPr id="3" name="Content Placeholder 2">
+            <a:extLst>
+              <a:ext uri="{FF2B5EF4-FFF2-40B4-BE49-F238E27FC236}">
+                <a16:creationId xmlns:a16="http://schemas.microsoft.com/office/drawing/2014/main" id="{CBCD23D1-79EE-E2C3-2F7B-39014A13B4C3}"/>
+              </a:ext>
+            </a:extLst>
+          </p:cNvPr>
+          <p:cNvSpPr>
+            <a:spLocks noGrp="1"/>
+          </p:cNvSpPr>
+          <p:nvPr>
+            <p:ph idx="1"/>
+          </p:nvPr>
+        </p:nvSpPr>
+        <p:spPr/>
+        <p:txBody>
+          <a:bodyPr/>
+          <a:lstStyle/>
+          <a:p>
+            <a:r>
+              <a:rPr lang="nl-NL" dirty="0"/>
+              <a:t>Sorry I make </a:t>
+            </a:r>
+            <a:r>
+              <a:rPr lang="nl-NL" dirty="0" err="1"/>
+              <a:t>you</a:t>
+            </a:r>
+            <a:r>
+              <a:rPr lang="nl-NL" dirty="0"/>
+              <a:t> </a:t>
+            </a:r>
+            <a:r>
+              <a:rPr lang="nl-NL" dirty="0" err="1"/>
+              <a:t>lush</a:t>
+            </a:r>
+            <a:endParaRPr lang="nl-NL" dirty="0"/>
+          </a:p>
+          <a:p>
+            <a:r>
+              <a:rPr lang="nl-NL" dirty="0" err="1"/>
+              <a:t>History</a:t>
+            </a:r>
+            <a:endParaRPr lang="nl-NL" dirty="0"/>
+          </a:p>
+        </p:txBody>
+      </p:sp>
+    </p:spTree>
+    <p:extLst>
+      <p:ext uri="{BB962C8B-B14F-4D97-AF65-F5344CB8AC3E}">
+        <p14:creationId xmlns:p14="http://schemas.microsoft.com/office/powerpoint/2010/main" val="722126772"/>
       </p:ext>
     </p:extLst>
   </p:cSld>
